--- a/latex/figure/fig4_governance_diagnostics.pptx
+++ b/latex/figure/fig4_governance_diagnostics.pptx
@@ -3258,7 +3258,7 @@
                 </a:solidFill>
                 <a:latin typeface="Helvetica"/>
               </a:rPr>
-              <a:t>BF</a:t>
+              <a:t>TOI</a:t>
             </a:r>
           </a:p>
         </p:txBody>
@@ -3271,7 +3271,7 @@
         </p:nvCxnSpPr>
         <p:spPr>
           <a:xfrm>
-            <a:off x="1087120" y="1549400"/>
+            <a:off x="1070356" y="1549400"/>
             <a:ext cx="0" cy="31750"/>
           </a:xfrm>
           <a:prstGeom prst="line">
@@ -3306,7 +3306,7 @@
         </p:nvSpPr>
         <p:spPr>
           <a:xfrm>
-            <a:off x="-436880" y="1571117"/>
+            <a:off x="-453644" y="1571117"/>
             <a:ext cx="3048000" cy="164592"/>
           </a:xfrm>
           <a:prstGeom prst="rect">
@@ -3328,7 +3328,7 @@
                 </a:solidFill>
                 <a:latin typeface="Helvetica"/>
               </a:rPr>
-              <a:t>R2</a:t>
+              <a:t>TOIVSF</a:t>
             </a:r>
           </a:p>
         </p:txBody>
@@ -3341,7 +3341,7 @@
         </p:nvCxnSpPr>
         <p:spPr>
           <a:xfrm>
-            <a:off x="1455928" y="1549400"/>
+            <a:off x="1422400" y="1549400"/>
             <a:ext cx="0" cy="31750"/>
           </a:xfrm>
           <a:prstGeom prst="line">
@@ -3376,7 +3376,7 @@
         </p:nvSpPr>
         <p:spPr>
           <a:xfrm>
-            <a:off x="-68072" y="1571117"/>
+            <a:off x="-101600" y="1571117"/>
             <a:ext cx="3048000" cy="164592"/>
           </a:xfrm>
           <a:prstGeom prst="rect">
@@ -3398,7 +3398,7 @@
                 </a:solidFill>
                 <a:latin typeface="Helvetica"/>
               </a:rPr>
-              <a:t>T1</a:t>
+              <a:t>GIMCC</a:t>
             </a:r>
           </a:p>
         </p:txBody>
@@ -3411,7 +3411,7 @@
         </p:nvCxnSpPr>
         <p:spPr>
           <a:xfrm>
-            <a:off x="1824736" y="1549400"/>
+            <a:off x="1774444" y="1549400"/>
             <a:ext cx="0" cy="31750"/>
           </a:xfrm>
           <a:prstGeom prst="line">
@@ -3446,7 +3446,7 @@
         </p:nvSpPr>
         <p:spPr>
           <a:xfrm>
-            <a:off x="300736" y="1571117"/>
+            <a:off x="250444" y="1571117"/>
             <a:ext cx="3048000" cy="164592"/>
           </a:xfrm>
           <a:prstGeom prst="rect">
@@ -3468,7 +3468,7 @@
                 </a:solidFill>
                 <a:latin typeface="Helvetica"/>
               </a:rPr>
-              <a:t>TATO</a:t>
+              <a:t>SRDI</a:t>
             </a:r>
           </a:p>
         </p:txBody>
@@ -3481,7 +3481,7 @@
         </p:nvCxnSpPr>
         <p:spPr>
           <a:xfrm>
-            <a:off x="2193544" y="1549400"/>
+            <a:off x="2126488" y="1549400"/>
             <a:ext cx="0" cy="31750"/>
           </a:xfrm>
           <a:prstGeom prst="line">
@@ -3516,7 +3516,7 @@
         </p:nvSpPr>
         <p:spPr>
           <a:xfrm>
-            <a:off x="669544" y="1571117"/>
+            <a:off x="602488" y="1571117"/>
             <a:ext cx="3048000" cy="164592"/>
           </a:xfrm>
           <a:prstGeom prst="rect">
@@ -3538,7 +3538,7 @@
                 </a:solidFill>
                 <a:latin typeface="Helvetica"/>
               </a:rPr>
-              <a:t>Ours</a:t>
+              <a:t>CTF</a:t>
             </a:r>
           </a:p>
         </p:txBody>
@@ -3888,7 +3888,7 @@
                 </a:solidFill>
                 <a:latin typeface="Helvetica"/>
               </a:rPr>
-              <a:t>(b) Predicted vs realised conservative utility</a:t>
+              <a:t>(b) Predicted vs realised ranking utility</a:t>
             </a:r>
           </a:p>
         </p:txBody>

--- a/latex/figure/fig4_governance_diagnostics.pptx
+++ b/latex/figure/fig4_governance_diagnostics.pptx
@@ -7,7 +7,7 @@
   <p:sldIdLst>
     <p:sldId id="256" r:id="rId7"/>
   </p:sldIdLst>
-  <p:sldSz cx="5029200" cy="1981200" type="screen4x3"/>
+  <p:sldSz cx="5029200" cy="2057400" type="screen4x3"/>
   <p:notesSz cx="6858000" cy="9144000"/>
   <p:defaultTextStyle>
     <a:defPPr>
@@ -3131,8 +3131,8 @@
         </p:nvCxnSpPr>
         <p:spPr>
           <a:xfrm>
-            <a:off x="584200" y="1549400"/>
-            <a:ext cx="1676400" cy="0"/>
+            <a:off x="787400" y="1498600"/>
+            <a:ext cx="1422400" cy="0"/>
           </a:xfrm>
           <a:prstGeom prst="line">
             <a:avLst/>
@@ -3166,8 +3166,8 @@
         </p:nvCxnSpPr>
         <p:spPr>
           <a:xfrm>
-            <a:off x="584200" y="381000"/>
-            <a:ext cx="0" cy="1168400"/>
+            <a:off x="787400" y="381000"/>
+            <a:ext cx="0" cy="1117600"/>
           </a:xfrm>
           <a:prstGeom prst="line">
             <a:avLst/>
@@ -3201,7 +3201,7 @@
         </p:nvCxnSpPr>
         <p:spPr>
           <a:xfrm>
-            <a:off x="718312" y="1549400"/>
+            <a:off x="787400" y="1498600"/>
             <a:ext cx="0" cy="31750"/>
           </a:xfrm>
           <a:prstGeom prst="line">
@@ -3236,7 +3236,7 @@
         </p:nvSpPr>
         <p:spPr>
           <a:xfrm>
-            <a:off x="-805688" y="1571117"/>
+            <a:off x="-736600" y="1520317"/>
             <a:ext cx="3048000" cy="164592"/>
           </a:xfrm>
           <a:prstGeom prst="rect">
@@ -3258,7 +3258,7 @@
                 </a:solidFill>
                 <a:latin typeface="Helvetica"/>
               </a:rPr>
-              <a:t>TOI</a:t>
+              <a:t>0.00</a:t>
             </a:r>
           </a:p>
         </p:txBody>
@@ -3271,7 +3271,7 @@
         </p:nvCxnSpPr>
         <p:spPr>
           <a:xfrm>
-            <a:off x="1070356" y="1549400"/>
+            <a:off x="1204946" y="1498600"/>
             <a:ext cx="0" cy="31750"/>
           </a:xfrm>
           <a:prstGeom prst="line">
@@ -3306,7 +3306,7 @@
         </p:nvSpPr>
         <p:spPr>
           <a:xfrm>
-            <a:off x="-453644" y="1571117"/>
+            <a:off x="-319053" y="1520317"/>
             <a:ext cx="3048000" cy="164592"/>
           </a:xfrm>
           <a:prstGeom prst="rect">
@@ -3328,7 +3328,7 @@
                 </a:solidFill>
                 <a:latin typeface="Helvetica"/>
               </a:rPr>
-              <a:t>TOIVSF</a:t>
+              <a:t>0.10</a:t>
             </a:r>
           </a:p>
         </p:txBody>
@@ -3341,7 +3341,7 @@
         </p:nvCxnSpPr>
         <p:spPr>
           <a:xfrm>
-            <a:off x="1422400" y="1549400"/>
+            <a:off x="1622493" y="1498600"/>
             <a:ext cx="0" cy="31750"/>
           </a:xfrm>
           <a:prstGeom prst="line">
@@ -3376,7 +3376,7 @@
         </p:nvSpPr>
         <p:spPr>
           <a:xfrm>
-            <a:off x="-101600" y="1571117"/>
+            <a:off x="98493" y="1520317"/>
             <a:ext cx="3048000" cy="164592"/>
           </a:xfrm>
           <a:prstGeom prst="rect">
@@ -3398,7 +3398,7 @@
                 </a:solidFill>
                 <a:latin typeface="Helvetica"/>
               </a:rPr>
-              <a:t>GIMCC</a:t>
+              <a:t>0.20</a:t>
             </a:r>
           </a:p>
         </p:txBody>
@@ -3411,7 +3411,7 @@
         </p:nvCxnSpPr>
         <p:spPr>
           <a:xfrm>
-            <a:off x="1774444" y="1549400"/>
+            <a:off x="2040040" y="1498600"/>
             <a:ext cx="0" cy="31750"/>
           </a:xfrm>
           <a:prstGeom prst="line">
@@ -3446,7 +3446,7 @@
         </p:nvSpPr>
         <p:spPr>
           <a:xfrm>
-            <a:off x="250444" y="1571117"/>
+            <a:off x="516040" y="1520317"/>
             <a:ext cx="3048000" cy="164592"/>
           </a:xfrm>
           <a:prstGeom prst="rect">
@@ -3468,7 +3468,7 @@
                 </a:solidFill>
                 <a:latin typeface="Helvetica"/>
               </a:rPr>
-              <a:t>SRDI</a:t>
+              <a:t>0.30</a:t>
             </a:r>
           </a:p>
         </p:txBody>
@@ -3481,8 +3481,8 @@
         </p:nvCxnSpPr>
         <p:spPr>
           <a:xfrm>
-            <a:off x="2126488" y="1549400"/>
-            <a:ext cx="0" cy="31750"/>
+            <a:off x="755650" y="474133"/>
+            <a:ext cx="31750" cy="0"/>
           </a:xfrm>
           <a:prstGeom prst="line">
             <a:avLst/>
@@ -3516,7 +3516,7 @@
         </p:nvSpPr>
         <p:spPr>
           <a:xfrm>
-            <a:off x="602488" y="1571117"/>
+            <a:off x="-782320" y="405680"/>
             <a:ext cx="3048000" cy="164592"/>
           </a:xfrm>
           <a:prstGeom prst="rect">
@@ -3530,7 +3530,7 @@
           </a:bodyPr>
           <a:lstStyle/>
           <a:p>
-            <a:pPr algn="ctr"/>
+            <a:pPr algn="r"/>
             <a:r>
               <a:rPr sz="540" b="0" i="0">
                 <a:solidFill>
@@ -3538,7 +3538,7 @@
                 </a:solidFill>
                 <a:latin typeface="Helvetica"/>
               </a:rPr>
-              <a:t>CTF</a:t>
+              <a:t>Keep</a:t>
             </a:r>
           </a:p>
         </p:txBody>
@@ -3551,7 +3551,7 @@
         </p:nvCxnSpPr>
         <p:spPr>
           <a:xfrm>
-            <a:off x="552450" y="1549400"/>
+            <a:off x="755650" y="660400"/>
             <a:ext cx="31750" cy="0"/>
           </a:xfrm>
           <a:prstGeom prst="line">
@@ -3586,7 +3586,7 @@
         </p:nvSpPr>
         <p:spPr>
           <a:xfrm>
-            <a:off x="-985519" y="1480947"/>
+            <a:off x="-782320" y="591947"/>
             <a:ext cx="3048000" cy="164592"/>
           </a:xfrm>
           <a:prstGeom prst="rect">
@@ -3608,7 +3608,7 @@
                 </a:solidFill>
                 <a:latin typeface="Helvetica"/>
               </a:rPr>
-              <a:t>0</a:t>
+              <a:t>Best Fixed</a:t>
             </a:r>
           </a:p>
         </p:txBody>
@@ -3621,7 +3621,7 @@
         </p:nvCxnSpPr>
         <p:spPr>
           <a:xfrm>
-            <a:off x="552450" y="965200"/>
+            <a:off x="755650" y="846666"/>
             <a:ext cx="31750" cy="0"/>
           </a:xfrm>
           <a:prstGeom prst="line">
@@ -3656,7 +3656,7 @@
         </p:nvSpPr>
         <p:spPr>
           <a:xfrm>
-            <a:off x="-985519" y="896747"/>
+            <a:off x="-782320" y="778213"/>
             <a:ext cx="3048000" cy="164592"/>
           </a:xfrm>
           <a:prstGeom prst="rect">
@@ -3678,7 +3678,7 @@
                 </a:solidFill>
                 <a:latin typeface="Helvetica"/>
               </a:rPr>
-              <a:t/>
+              <a:t>R2-CART</a:t>
             </a:r>
           </a:p>
         </p:txBody>
@@ -3691,7 +3691,7 @@
         </p:nvCxnSpPr>
         <p:spPr>
           <a:xfrm>
-            <a:off x="552450" y="381000"/>
+            <a:off x="755650" y="1032933"/>
             <a:ext cx="31750" cy="0"/>
           </a:xfrm>
           <a:prstGeom prst="line">
@@ -3726,7 +3726,7 @@
         </p:nvSpPr>
         <p:spPr>
           <a:xfrm>
-            <a:off x="-985519" y="312547"/>
+            <a:off x="-782320" y="964480"/>
             <a:ext cx="3048000" cy="164592"/>
           </a:xfrm>
           <a:prstGeom prst="rect">
@@ -3748,20 +3748,160 @@
                 </a:solidFill>
                 <a:latin typeface="Helvetica"/>
               </a:rPr>
-              <a:t/>
-            </a:r>
-          </a:p>
-        </p:txBody>
-      </p:sp>
-      <p:sp>
-        <p:nvSpPr>
-          <p:cNvPr id="21" name="TextBox 20"/>
+              <a:t>SAITS</a:t>
+            </a:r>
+          </a:p>
+        </p:txBody>
+      </p:sp>
+      <p:cxnSp>
+        <p:nvCxnSpPr>
+          <p:cNvPr id="21" name="Connector 20"/>
+          <p:cNvCxnSpPr/>
+          <p:nvPr/>
+        </p:nvCxnSpPr>
+        <p:spPr>
+          <a:xfrm>
+            <a:off x="755650" y="1219200"/>
+            <a:ext cx="31750" cy="0"/>
+          </a:xfrm>
+          <a:prstGeom prst="line">
+            <a:avLst/>
+          </a:prstGeom>
+          <a:ln w="7620">
+            <a:solidFill>
+              <a:srgbClr val="1C1E23"/>
+            </a:solidFill>
+          </a:ln>
+        </p:spPr>
+        <p:style>
+          <a:lnRef idx="2">
+            <a:schemeClr val="accent1"/>
+          </a:lnRef>
+          <a:fillRef idx="0">
+            <a:schemeClr val="accent1"/>
+          </a:fillRef>
+          <a:effectRef idx="1">
+            <a:schemeClr val="accent1"/>
+          </a:effectRef>
+          <a:fontRef idx="minor">
+            <a:schemeClr val="tx1"/>
+          </a:fontRef>
+        </p:style>
+      </p:cxnSp>
+      <p:sp>
+        <p:nvSpPr>
+          <p:cNvPr id="22" name="TextBox 21"/>
           <p:cNvSpPr txBox="1"/>
           <p:nvPr/>
         </p:nvSpPr>
         <p:spPr>
           <a:xfrm>
-            <a:off x="-101600" y="1668780"/>
+            <a:off x="-782320" y="1150747"/>
+            <a:ext cx="3048000" cy="164592"/>
+          </a:xfrm>
+          <a:prstGeom prst="rect">
+            <a:avLst/>
+          </a:prstGeom>
+          <a:noFill/>
+        </p:spPr>
+        <p:txBody>
+          <a:bodyPr wrap="none" lIns="0" rIns="0" tIns="0" bIns="0" anchor="ctr">
+            <a:spAutoFit/>
+          </a:bodyPr>
+          <a:lstStyle/>
+          <a:p>
+            <a:pPr algn="r"/>
+            <a:r>
+              <a:rPr sz="540" b="0" i="0">
+                <a:solidFill>
+                  <a:srgbClr val="6B727C"/>
+                </a:solidFill>
+                <a:latin typeface="Helvetica"/>
+              </a:rPr>
+              <a:t>TATO</a:t>
+            </a:r>
+          </a:p>
+        </p:txBody>
+      </p:sp>
+      <p:cxnSp>
+        <p:nvCxnSpPr>
+          <p:cNvPr id="23" name="Connector 22"/>
+          <p:cNvCxnSpPr/>
+          <p:nvPr/>
+        </p:nvCxnSpPr>
+        <p:spPr>
+          <a:xfrm>
+            <a:off x="755650" y="1405466"/>
+            <a:ext cx="31750" cy="0"/>
+          </a:xfrm>
+          <a:prstGeom prst="line">
+            <a:avLst/>
+          </a:prstGeom>
+          <a:ln w="7620">
+            <a:solidFill>
+              <a:srgbClr val="1C1E23"/>
+            </a:solidFill>
+          </a:ln>
+        </p:spPr>
+        <p:style>
+          <a:lnRef idx="2">
+            <a:schemeClr val="accent1"/>
+          </a:lnRef>
+          <a:fillRef idx="0">
+            <a:schemeClr val="accent1"/>
+          </a:fillRef>
+          <a:effectRef idx="1">
+            <a:schemeClr val="accent1"/>
+          </a:effectRef>
+          <a:fontRef idx="minor">
+            <a:schemeClr val="tx1"/>
+          </a:fontRef>
+        </p:style>
+      </p:cxnSp>
+      <p:sp>
+        <p:nvSpPr>
+          <p:cNvPr id="24" name="TextBox 23"/>
+          <p:cNvSpPr txBox="1"/>
+          <p:nvPr/>
+        </p:nvSpPr>
+        <p:spPr>
+          <a:xfrm>
+            <a:off x="-782320" y="1337013"/>
+            <a:ext cx="3048000" cy="164592"/>
+          </a:xfrm>
+          <a:prstGeom prst="rect">
+            <a:avLst/>
+          </a:prstGeom>
+          <a:noFill/>
+        </p:spPr>
+        <p:txBody>
+          <a:bodyPr wrap="none" lIns="0" rIns="0" tIns="0" bIns="0" anchor="ctr">
+            <a:spAutoFit/>
+          </a:bodyPr>
+          <a:lstStyle/>
+          <a:p>
+            <a:pPr algn="r"/>
+            <a:r>
+              <a:rPr sz="540" b="0" i="0">
+                <a:solidFill>
+                  <a:srgbClr val="6B727C"/>
+                </a:solidFill>
+                <a:latin typeface="Helvetica"/>
+              </a:rPr>
+              <a:t>IntroAct-TS</a:t>
+            </a:r>
+          </a:p>
+        </p:txBody>
+      </p:sp>
+      <p:sp>
+        <p:nvSpPr>
+          <p:cNvPr id="25" name="TextBox 24"/>
+          <p:cNvSpPr txBox="1"/>
+          <p:nvPr/>
+        </p:nvSpPr>
+        <p:spPr>
+          <a:xfrm>
+            <a:off x="-25400" y="1617980"/>
             <a:ext cx="3048000" cy="182879"/>
           </a:xfrm>
           <a:prstGeom prst="rect">
@@ -3783,20 +3923,1521 @@
                 </a:solidFill>
                 <a:latin typeface="Helvetica"/>
               </a:rPr>
-              <a:t>method</a:t>
-            </a:r>
-          </a:p>
-        </p:txBody>
-      </p:sp>
-      <p:sp>
-        <p:nvSpPr>
-          <p:cNvPr id="22" name="TextBox 21"/>
+              <a:t>harmful loss (lower is better)</a:t>
+            </a:r>
+          </a:p>
+        </p:txBody>
+      </p:sp>
+      <p:sp>
+        <p:nvSpPr>
+          <p:cNvPr id="26" name="Rectangle 25"/>
+          <p:cNvSpPr/>
+          <p:nvPr/>
+        </p:nvSpPr>
+        <p:spPr>
+          <a:xfrm>
+            <a:off x="787400" y="425703"/>
+            <a:ext cx="5080" cy="96858"/>
+          </a:xfrm>
+          <a:prstGeom prst="rect">
+            <a:avLst/>
+          </a:prstGeom>
+          <a:solidFill>
+            <a:srgbClr val="CCCED3"/>
+          </a:solidFill>
+          <a:ln w="7620">
+            <a:solidFill>
+              <a:srgbClr val="9EA5AD"/>
+            </a:solidFill>
+          </a:ln>
+          <a:effectLst/>
+        </p:spPr>
+        <p:style>
+          <a:lnRef idx="1">
+            <a:schemeClr val="accent1"/>
+          </a:lnRef>
+          <a:fillRef idx="3">
+            <a:schemeClr val="accent1"/>
+          </a:fillRef>
+          <a:effectRef idx="2">
+            <a:schemeClr val="accent1"/>
+          </a:effectRef>
+          <a:fontRef idx="minor">
+            <a:schemeClr val="lt1"/>
+          </a:fontRef>
+        </p:style>
+        <p:txBody>
+          <a:bodyPr rtlCol="0" anchor="ctr"/>
+          <a:lstStyle/>
+          <a:p>
+            <a:pPr algn="ctr"/>
+          </a:p>
+        </p:txBody>
+      </p:sp>
+      <p:sp>
+        <p:nvSpPr>
+          <p:cNvPr id="27" name="TextBox 26"/>
           <p:cNvSpPr txBox="1"/>
           <p:nvPr/>
         </p:nvSpPr>
         <p:spPr>
           <a:xfrm>
-            <a:off x="-977900" y="224917"/>
+            <a:off x="-703580" y="415586"/>
+            <a:ext cx="3048000" cy="140208"/>
+          </a:xfrm>
+          <a:prstGeom prst="rect">
+            <a:avLst/>
+          </a:prstGeom>
+          <a:noFill/>
+        </p:spPr>
+        <p:txBody>
+          <a:bodyPr wrap="none" lIns="0" rIns="0" tIns="0" bIns="0" anchor="ctr">
+            <a:spAutoFit/>
+          </a:bodyPr>
+          <a:lstStyle/>
+          <a:p>
+            <a:pPr algn="l"/>
+            <a:r>
+              <a:rPr sz="459" b="0" i="0">
+                <a:solidFill>
+                  <a:srgbClr val="6B727C"/>
+                </a:solidFill>
+                <a:latin typeface="Helvetica"/>
+              </a:rPr>
+              <a:t>0.000</a:t>
+            </a:r>
+          </a:p>
+        </p:txBody>
+      </p:sp>
+      <p:sp>
+        <p:nvSpPr>
+          <p:cNvPr id="28" name="Rectangle 27"/>
+          <p:cNvSpPr/>
+          <p:nvPr/>
+        </p:nvSpPr>
+        <p:spPr>
+          <a:xfrm>
+            <a:off x="787400" y="611970"/>
+            <a:ext cx="223620" cy="96858"/>
+          </a:xfrm>
+          <a:prstGeom prst="rect">
+            <a:avLst/>
+          </a:prstGeom>
+          <a:solidFill>
+            <a:srgbClr val="CCCED3"/>
+          </a:solidFill>
+          <a:ln w="7620">
+            <a:solidFill>
+              <a:srgbClr val="9EA5AD"/>
+            </a:solidFill>
+          </a:ln>
+          <a:effectLst/>
+        </p:spPr>
+        <p:style>
+          <a:lnRef idx="1">
+            <a:schemeClr val="accent1"/>
+          </a:lnRef>
+          <a:fillRef idx="3">
+            <a:schemeClr val="accent1"/>
+          </a:fillRef>
+          <a:effectRef idx="2">
+            <a:schemeClr val="accent1"/>
+          </a:effectRef>
+          <a:fontRef idx="minor">
+            <a:schemeClr val="lt1"/>
+          </a:fontRef>
+        </p:style>
+        <p:txBody>
+          <a:bodyPr rtlCol="0" anchor="ctr"/>
+          <a:lstStyle/>
+          <a:p>
+            <a:pPr algn="ctr"/>
+          </a:p>
+        </p:txBody>
+      </p:sp>
+      <p:sp>
+        <p:nvSpPr>
+          <p:cNvPr id="29" name="TextBox 28"/>
+          <p:cNvSpPr txBox="1"/>
+          <p:nvPr/>
+        </p:nvSpPr>
+        <p:spPr>
+          <a:xfrm>
+            <a:off x="-479959" y="601853"/>
+            <a:ext cx="3048000" cy="140208"/>
+          </a:xfrm>
+          <a:prstGeom prst="rect">
+            <a:avLst/>
+          </a:prstGeom>
+          <a:noFill/>
+        </p:spPr>
+        <p:txBody>
+          <a:bodyPr wrap="none" lIns="0" rIns="0" tIns="0" bIns="0" anchor="ctr">
+            <a:spAutoFit/>
+          </a:bodyPr>
+          <a:lstStyle/>
+          <a:p>
+            <a:pPr algn="l"/>
+            <a:r>
+              <a:rPr sz="459" b="0" i="0">
+                <a:solidFill>
+                  <a:srgbClr val="6B727C"/>
+                </a:solidFill>
+                <a:latin typeface="Helvetica"/>
+              </a:rPr>
+              <a:t>0.054</a:t>
+            </a:r>
+          </a:p>
+        </p:txBody>
+      </p:sp>
+      <p:sp>
+        <p:nvSpPr>
+          <p:cNvPr id="30" name="Rectangle 29"/>
+          <p:cNvSpPr/>
+          <p:nvPr/>
+        </p:nvSpPr>
+        <p:spPr>
+          <a:xfrm>
+            <a:off x="787400" y="798237"/>
+            <a:ext cx="210778" cy="96858"/>
+          </a:xfrm>
+          <a:prstGeom prst="rect">
+            <a:avLst/>
+          </a:prstGeom>
+          <a:solidFill>
+            <a:srgbClr val="CCCED3"/>
+          </a:solidFill>
+          <a:ln w="7620">
+            <a:solidFill>
+              <a:srgbClr val="9EA5AD"/>
+            </a:solidFill>
+          </a:ln>
+          <a:effectLst/>
+        </p:spPr>
+        <p:style>
+          <a:lnRef idx="1">
+            <a:schemeClr val="accent1"/>
+          </a:lnRef>
+          <a:fillRef idx="3">
+            <a:schemeClr val="accent1"/>
+          </a:fillRef>
+          <a:effectRef idx="2">
+            <a:schemeClr val="accent1"/>
+          </a:effectRef>
+          <a:fontRef idx="minor">
+            <a:schemeClr val="lt1"/>
+          </a:fontRef>
+        </p:style>
+        <p:txBody>
+          <a:bodyPr rtlCol="0" anchor="ctr"/>
+          <a:lstStyle/>
+          <a:p>
+            <a:pPr algn="ctr"/>
+          </a:p>
+        </p:txBody>
+      </p:sp>
+      <p:sp>
+        <p:nvSpPr>
+          <p:cNvPr id="31" name="TextBox 30"/>
+          <p:cNvSpPr txBox="1"/>
+          <p:nvPr/>
+        </p:nvSpPr>
+        <p:spPr>
+          <a:xfrm>
+            <a:off x="-492801" y="788119"/>
+            <a:ext cx="3048000" cy="140208"/>
+          </a:xfrm>
+          <a:prstGeom prst="rect">
+            <a:avLst/>
+          </a:prstGeom>
+          <a:noFill/>
+        </p:spPr>
+        <p:txBody>
+          <a:bodyPr wrap="none" lIns="0" rIns="0" tIns="0" bIns="0" anchor="ctr">
+            <a:spAutoFit/>
+          </a:bodyPr>
+          <a:lstStyle/>
+          <a:p>
+            <a:pPr algn="l"/>
+            <a:r>
+              <a:rPr sz="459" b="0" i="0">
+                <a:solidFill>
+                  <a:srgbClr val="6B727C"/>
+                </a:solidFill>
+                <a:latin typeface="Helvetica"/>
+              </a:rPr>
+              <a:t>0.050</a:t>
+            </a:r>
+          </a:p>
+        </p:txBody>
+      </p:sp>
+      <p:sp>
+        <p:nvSpPr>
+          <p:cNvPr id="32" name="Rectangle 31"/>
+          <p:cNvSpPr/>
+          <p:nvPr/>
+        </p:nvSpPr>
+        <p:spPr>
+          <a:xfrm>
+            <a:off x="787400" y="984504"/>
+            <a:ext cx="444513" cy="96858"/>
+          </a:xfrm>
+          <a:prstGeom prst="rect">
+            <a:avLst/>
+          </a:prstGeom>
+          <a:solidFill>
+            <a:srgbClr val="CCCED3"/>
+          </a:solidFill>
+          <a:ln w="7620">
+            <a:solidFill>
+              <a:srgbClr val="9EA5AD"/>
+            </a:solidFill>
+          </a:ln>
+          <a:effectLst/>
+        </p:spPr>
+        <p:style>
+          <a:lnRef idx="1">
+            <a:schemeClr val="accent1"/>
+          </a:lnRef>
+          <a:fillRef idx="3">
+            <a:schemeClr val="accent1"/>
+          </a:fillRef>
+          <a:effectRef idx="2">
+            <a:schemeClr val="accent1"/>
+          </a:effectRef>
+          <a:fontRef idx="minor">
+            <a:schemeClr val="lt1"/>
+          </a:fontRef>
+        </p:style>
+        <p:txBody>
+          <a:bodyPr rtlCol="0" anchor="ctr"/>
+          <a:lstStyle/>
+          <a:p>
+            <a:pPr algn="ctr"/>
+          </a:p>
+        </p:txBody>
+      </p:sp>
+      <p:sp>
+        <p:nvSpPr>
+          <p:cNvPr id="33" name="TextBox 32"/>
+          <p:cNvSpPr txBox="1"/>
+          <p:nvPr/>
+        </p:nvSpPr>
+        <p:spPr>
+          <a:xfrm>
+            <a:off x="-259066" y="974386"/>
+            <a:ext cx="3048000" cy="140208"/>
+          </a:xfrm>
+          <a:prstGeom prst="rect">
+            <a:avLst/>
+          </a:prstGeom>
+          <a:noFill/>
+        </p:spPr>
+        <p:txBody>
+          <a:bodyPr wrap="none" lIns="0" rIns="0" tIns="0" bIns="0" anchor="ctr">
+            <a:spAutoFit/>
+          </a:bodyPr>
+          <a:lstStyle/>
+          <a:p>
+            <a:pPr algn="l"/>
+            <a:r>
+              <a:rPr sz="459" b="0" i="0">
+                <a:solidFill>
+                  <a:srgbClr val="6B727C"/>
+                </a:solidFill>
+                <a:latin typeface="Helvetica"/>
+              </a:rPr>
+              <a:t>0.106</a:t>
+            </a:r>
+          </a:p>
+        </p:txBody>
+      </p:sp>
+      <p:sp>
+        <p:nvSpPr>
+          <p:cNvPr id="34" name="Rectangle 33"/>
+          <p:cNvSpPr/>
+          <p:nvPr/>
+        </p:nvSpPr>
+        <p:spPr>
+          <a:xfrm>
+            <a:off x="787400" y="1170770"/>
+            <a:ext cx="1226206" cy="96858"/>
+          </a:xfrm>
+          <a:prstGeom prst="rect">
+            <a:avLst/>
+          </a:prstGeom>
+          <a:solidFill>
+            <a:srgbClr val="CCCED3"/>
+          </a:solidFill>
+          <a:ln w="7620">
+            <a:solidFill>
+              <a:srgbClr val="9EA5AD"/>
+            </a:solidFill>
+          </a:ln>
+          <a:effectLst/>
+        </p:spPr>
+        <p:style>
+          <a:lnRef idx="1">
+            <a:schemeClr val="accent1"/>
+          </a:lnRef>
+          <a:fillRef idx="3">
+            <a:schemeClr val="accent1"/>
+          </a:fillRef>
+          <a:effectRef idx="2">
+            <a:schemeClr val="accent1"/>
+          </a:effectRef>
+          <a:fontRef idx="minor">
+            <a:schemeClr val="lt1"/>
+          </a:fontRef>
+        </p:style>
+        <p:txBody>
+          <a:bodyPr rtlCol="0" anchor="ctr"/>
+          <a:lstStyle/>
+          <a:p>
+            <a:pPr algn="ctr"/>
+          </a:p>
+        </p:txBody>
+      </p:sp>
+      <p:sp>
+        <p:nvSpPr>
+          <p:cNvPr id="35" name="TextBox 34"/>
+          <p:cNvSpPr txBox="1"/>
+          <p:nvPr/>
+        </p:nvSpPr>
+        <p:spPr>
+          <a:xfrm>
+            <a:off x="522626" y="1160652"/>
+            <a:ext cx="3048000" cy="140208"/>
+          </a:xfrm>
+          <a:prstGeom prst="rect">
+            <a:avLst/>
+          </a:prstGeom>
+          <a:noFill/>
+        </p:spPr>
+        <p:txBody>
+          <a:bodyPr wrap="none" lIns="0" rIns="0" tIns="0" bIns="0" anchor="ctr">
+            <a:spAutoFit/>
+          </a:bodyPr>
+          <a:lstStyle/>
+          <a:p>
+            <a:pPr algn="l"/>
+            <a:r>
+              <a:rPr sz="459" b="0" i="0">
+                <a:solidFill>
+                  <a:srgbClr val="6B727C"/>
+                </a:solidFill>
+                <a:latin typeface="Helvetica"/>
+              </a:rPr>
+              <a:t>0.294</a:t>
+            </a:r>
+          </a:p>
+        </p:txBody>
+      </p:sp>
+      <p:sp>
+        <p:nvSpPr>
+          <p:cNvPr id="36" name="Rectangle 35"/>
+          <p:cNvSpPr/>
+          <p:nvPr/>
+        </p:nvSpPr>
+        <p:spPr>
+          <a:xfrm>
+            <a:off x="787400" y="1357037"/>
+            <a:ext cx="122907" cy="96858"/>
+          </a:xfrm>
+          <a:prstGeom prst="rect">
+            <a:avLst/>
+          </a:prstGeom>
+          <a:solidFill>
+            <a:srgbClr val="215499"/>
+          </a:solidFill>
+          <a:ln w="7620">
+            <a:solidFill>
+              <a:srgbClr val="1C1E23"/>
+            </a:solidFill>
+          </a:ln>
+          <a:effectLst/>
+        </p:spPr>
+        <p:style>
+          <a:lnRef idx="1">
+            <a:schemeClr val="accent1"/>
+          </a:lnRef>
+          <a:fillRef idx="3">
+            <a:schemeClr val="accent1"/>
+          </a:fillRef>
+          <a:effectRef idx="2">
+            <a:schemeClr val="accent1"/>
+          </a:effectRef>
+          <a:fontRef idx="minor">
+            <a:schemeClr val="lt1"/>
+          </a:fontRef>
+        </p:style>
+        <p:txBody>
+          <a:bodyPr rtlCol="0" anchor="ctr"/>
+          <a:lstStyle/>
+          <a:p>
+            <a:pPr algn="ctr"/>
+          </a:p>
+        </p:txBody>
+      </p:sp>
+      <p:sp>
+        <p:nvSpPr>
+          <p:cNvPr id="37" name="TextBox 36"/>
+          <p:cNvSpPr txBox="1"/>
+          <p:nvPr/>
+        </p:nvSpPr>
+        <p:spPr>
+          <a:xfrm>
+            <a:off x="-580672" y="1346919"/>
+            <a:ext cx="3048000" cy="140208"/>
+          </a:xfrm>
+          <a:prstGeom prst="rect">
+            <a:avLst/>
+          </a:prstGeom>
+          <a:noFill/>
+        </p:spPr>
+        <p:txBody>
+          <a:bodyPr wrap="none" lIns="0" rIns="0" tIns="0" bIns="0" anchor="ctr">
+            <a:spAutoFit/>
+          </a:bodyPr>
+          <a:lstStyle/>
+          <a:p>
+            <a:pPr algn="l"/>
+            <a:r>
+              <a:rPr sz="459" b="0" i="0">
+                <a:solidFill>
+                  <a:srgbClr val="1C1E23"/>
+                </a:solidFill>
+                <a:latin typeface="Helvetica"/>
+              </a:rPr>
+              <a:t>0.029</a:t>
+            </a:r>
+          </a:p>
+        </p:txBody>
+      </p:sp>
+      <p:sp>
+        <p:nvSpPr>
+          <p:cNvPr id="38" name="TextBox 37"/>
+          <p:cNvSpPr txBox="1"/>
+          <p:nvPr/>
+        </p:nvSpPr>
+        <p:spPr>
+          <a:xfrm>
+            <a:off x="-25400" y="1762633"/>
+            <a:ext cx="3048000" cy="140208"/>
+          </a:xfrm>
+          <a:prstGeom prst="rect">
+            <a:avLst/>
+          </a:prstGeom>
+          <a:noFill/>
+        </p:spPr>
+        <p:txBody>
+          <a:bodyPr wrap="none" lIns="0" rIns="0" tIns="0" bIns="0" anchor="ctr">
+            <a:spAutoFit/>
+          </a:bodyPr>
+          <a:lstStyle/>
+          <a:p>
+            <a:pPr algn="ctr"/>
+            <a:r>
+              <a:rPr sz="459" b="0" i="0">
+                <a:solidFill>
+                  <a:srgbClr val="6B727C"/>
+                </a:solidFill>
+                <a:latin typeface="Helvetica"/>
+              </a:rPr>
+              <a:t>mean over the three backbones, and the reference action adds none</a:t>
+            </a:r>
+          </a:p>
+        </p:txBody>
+      </p:sp>
+      <p:sp>
+        <p:nvSpPr>
+          <p:cNvPr id="39" name="TextBox 38"/>
+          <p:cNvSpPr txBox="1"/>
+          <p:nvPr/>
+        </p:nvSpPr>
+        <p:spPr>
+          <a:xfrm>
+            <a:off x="1092200" y="11429"/>
+            <a:ext cx="3048000" cy="182879"/>
+          </a:xfrm>
+          <a:prstGeom prst="rect">
+            <a:avLst/>
+          </a:prstGeom>
+          <a:noFill/>
+        </p:spPr>
+        <p:txBody>
+          <a:bodyPr wrap="none" lIns="0" rIns="0" tIns="0" bIns="0" anchor="ctr">
+            <a:spAutoFit/>
+          </a:bodyPr>
+          <a:lstStyle/>
+          <a:p>
+            <a:pPr algn="l"/>
+            <a:r>
+              <a:rPr sz="600" b="1" i="0">
+                <a:solidFill>
+                  <a:srgbClr val="1C1E23"/>
+                </a:solidFill>
+                <a:latin typeface="Helvetica"/>
+              </a:rPr>
+              <a:t>(b) Realised utility against the score bin</a:t>
+            </a:r>
+          </a:p>
+        </p:txBody>
+      </p:sp>
+      <p:cxnSp>
+        <p:nvCxnSpPr>
+          <p:cNvPr id="40" name="Connector 39"/>
+          <p:cNvCxnSpPr/>
+          <p:nvPr/>
+        </p:nvCxnSpPr>
+        <p:spPr>
+          <a:xfrm>
+            <a:off x="3175000" y="1498600"/>
+            <a:ext cx="1676400" cy="0"/>
+          </a:xfrm>
+          <a:prstGeom prst="line">
+            <a:avLst/>
+          </a:prstGeom>
+          <a:ln w="8890">
+            <a:solidFill>
+              <a:srgbClr val="1C1E23"/>
+            </a:solidFill>
+          </a:ln>
+        </p:spPr>
+        <p:style>
+          <a:lnRef idx="2">
+            <a:schemeClr val="accent1"/>
+          </a:lnRef>
+          <a:fillRef idx="0">
+            <a:schemeClr val="accent1"/>
+          </a:fillRef>
+          <a:effectRef idx="1">
+            <a:schemeClr val="accent1"/>
+          </a:effectRef>
+          <a:fontRef idx="minor">
+            <a:schemeClr val="tx1"/>
+          </a:fontRef>
+        </p:style>
+      </p:cxnSp>
+      <p:cxnSp>
+        <p:nvCxnSpPr>
+          <p:cNvPr id="41" name="Connector 40"/>
+          <p:cNvCxnSpPr/>
+          <p:nvPr/>
+        </p:nvCxnSpPr>
+        <p:spPr>
+          <a:xfrm>
+            <a:off x="3175000" y="406400"/>
+            <a:ext cx="0" cy="1092200"/>
+          </a:xfrm>
+          <a:prstGeom prst="line">
+            <a:avLst/>
+          </a:prstGeom>
+          <a:ln w="8890">
+            <a:solidFill>
+              <a:srgbClr val="1C1E23"/>
+            </a:solidFill>
+          </a:ln>
+        </p:spPr>
+        <p:style>
+          <a:lnRef idx="2">
+            <a:schemeClr val="accent1"/>
+          </a:lnRef>
+          <a:fillRef idx="0">
+            <a:schemeClr val="accent1"/>
+          </a:fillRef>
+          <a:effectRef idx="1">
+            <a:schemeClr val="accent1"/>
+          </a:effectRef>
+          <a:fontRef idx="minor">
+            <a:schemeClr val="tx1"/>
+          </a:fontRef>
+        </p:style>
+      </p:cxnSp>
+      <p:cxnSp>
+        <p:nvCxnSpPr>
+          <p:cNvPr id="42" name="Connector 41"/>
+          <p:cNvCxnSpPr/>
+          <p:nvPr/>
+        </p:nvCxnSpPr>
+        <p:spPr>
+          <a:xfrm>
+            <a:off x="3279775" y="1498600"/>
+            <a:ext cx="0" cy="31750"/>
+          </a:xfrm>
+          <a:prstGeom prst="line">
+            <a:avLst/>
+          </a:prstGeom>
+          <a:ln w="7620">
+            <a:solidFill>
+              <a:srgbClr val="1C1E23"/>
+            </a:solidFill>
+          </a:ln>
+        </p:spPr>
+        <p:style>
+          <a:lnRef idx="2">
+            <a:schemeClr val="accent1"/>
+          </a:lnRef>
+          <a:fillRef idx="0">
+            <a:schemeClr val="accent1"/>
+          </a:fillRef>
+          <a:effectRef idx="1">
+            <a:schemeClr val="accent1"/>
+          </a:effectRef>
+          <a:fontRef idx="minor">
+            <a:schemeClr val="tx1"/>
+          </a:fontRef>
+        </p:style>
+      </p:cxnSp>
+      <p:sp>
+        <p:nvSpPr>
+          <p:cNvPr id="43" name="TextBox 42"/>
+          <p:cNvSpPr txBox="1"/>
+          <p:nvPr/>
+        </p:nvSpPr>
+        <p:spPr>
+          <a:xfrm>
+            <a:off x="1755775" y="1520317"/>
+            <a:ext cx="3048000" cy="164592"/>
+          </a:xfrm>
+          <a:prstGeom prst="rect">
+            <a:avLst/>
+          </a:prstGeom>
+          <a:noFill/>
+        </p:spPr>
+        <p:txBody>
+          <a:bodyPr wrap="none" lIns="0" rIns="0" tIns="0" bIns="0" anchor="ctr">
+            <a:spAutoFit/>
+          </a:bodyPr>
+          <a:lstStyle/>
+          <a:p>
+            <a:pPr algn="ctr"/>
+            <a:r>
+              <a:rPr sz="540" b="0" i="0">
+                <a:solidFill>
+                  <a:srgbClr val="6B727C"/>
+                </a:solidFill>
+                <a:latin typeface="Helvetica"/>
+              </a:rPr>
+              <a:t>1</a:t>
+            </a:r>
+          </a:p>
+        </p:txBody>
+      </p:sp>
+      <p:cxnSp>
+        <p:nvCxnSpPr>
+          <p:cNvPr id="44" name="Connector 43"/>
+          <p:cNvCxnSpPr/>
+          <p:nvPr/>
+        </p:nvCxnSpPr>
+        <p:spPr>
+          <a:xfrm>
+            <a:off x="3489325" y="1498600"/>
+            <a:ext cx="0" cy="31750"/>
+          </a:xfrm>
+          <a:prstGeom prst="line">
+            <a:avLst/>
+          </a:prstGeom>
+          <a:ln w="7620">
+            <a:solidFill>
+              <a:srgbClr val="1C1E23"/>
+            </a:solidFill>
+          </a:ln>
+        </p:spPr>
+        <p:style>
+          <a:lnRef idx="2">
+            <a:schemeClr val="accent1"/>
+          </a:lnRef>
+          <a:fillRef idx="0">
+            <a:schemeClr val="accent1"/>
+          </a:fillRef>
+          <a:effectRef idx="1">
+            <a:schemeClr val="accent1"/>
+          </a:effectRef>
+          <a:fontRef idx="minor">
+            <a:schemeClr val="tx1"/>
+          </a:fontRef>
+        </p:style>
+      </p:cxnSp>
+      <p:sp>
+        <p:nvSpPr>
+          <p:cNvPr id="45" name="TextBox 44"/>
+          <p:cNvSpPr txBox="1"/>
+          <p:nvPr/>
+        </p:nvSpPr>
+        <p:spPr>
+          <a:xfrm>
+            <a:off x="1965325" y="1520317"/>
+            <a:ext cx="3048000" cy="164592"/>
+          </a:xfrm>
+          <a:prstGeom prst="rect">
+            <a:avLst/>
+          </a:prstGeom>
+          <a:noFill/>
+        </p:spPr>
+        <p:txBody>
+          <a:bodyPr wrap="none" lIns="0" rIns="0" tIns="0" bIns="0" anchor="ctr">
+            <a:spAutoFit/>
+          </a:bodyPr>
+          <a:lstStyle/>
+          <a:p>
+            <a:pPr algn="ctr"/>
+            <a:r>
+              <a:rPr sz="540" b="0" i="0">
+                <a:solidFill>
+                  <a:srgbClr val="6B727C"/>
+                </a:solidFill>
+                <a:latin typeface="Helvetica"/>
+              </a:rPr>
+              <a:t>2</a:t>
+            </a:r>
+          </a:p>
+        </p:txBody>
+      </p:sp>
+      <p:cxnSp>
+        <p:nvCxnSpPr>
+          <p:cNvPr id="46" name="Connector 45"/>
+          <p:cNvCxnSpPr/>
+          <p:nvPr/>
+        </p:nvCxnSpPr>
+        <p:spPr>
+          <a:xfrm>
+            <a:off x="3698875" y="1498600"/>
+            <a:ext cx="0" cy="31750"/>
+          </a:xfrm>
+          <a:prstGeom prst="line">
+            <a:avLst/>
+          </a:prstGeom>
+          <a:ln w="7620">
+            <a:solidFill>
+              <a:srgbClr val="1C1E23"/>
+            </a:solidFill>
+          </a:ln>
+        </p:spPr>
+        <p:style>
+          <a:lnRef idx="2">
+            <a:schemeClr val="accent1"/>
+          </a:lnRef>
+          <a:fillRef idx="0">
+            <a:schemeClr val="accent1"/>
+          </a:fillRef>
+          <a:effectRef idx="1">
+            <a:schemeClr val="accent1"/>
+          </a:effectRef>
+          <a:fontRef idx="minor">
+            <a:schemeClr val="tx1"/>
+          </a:fontRef>
+        </p:style>
+      </p:cxnSp>
+      <p:sp>
+        <p:nvSpPr>
+          <p:cNvPr id="47" name="TextBox 46"/>
+          <p:cNvSpPr txBox="1"/>
+          <p:nvPr/>
+        </p:nvSpPr>
+        <p:spPr>
+          <a:xfrm>
+            <a:off x="2174875" y="1520317"/>
+            <a:ext cx="3048000" cy="164592"/>
+          </a:xfrm>
+          <a:prstGeom prst="rect">
+            <a:avLst/>
+          </a:prstGeom>
+          <a:noFill/>
+        </p:spPr>
+        <p:txBody>
+          <a:bodyPr wrap="none" lIns="0" rIns="0" tIns="0" bIns="0" anchor="ctr">
+            <a:spAutoFit/>
+          </a:bodyPr>
+          <a:lstStyle/>
+          <a:p>
+            <a:pPr algn="ctr"/>
+            <a:r>
+              <a:rPr sz="540" b="0" i="0">
+                <a:solidFill>
+                  <a:srgbClr val="6B727C"/>
+                </a:solidFill>
+                <a:latin typeface="Helvetica"/>
+              </a:rPr>
+              <a:t>3</a:t>
+            </a:r>
+          </a:p>
+        </p:txBody>
+      </p:sp>
+      <p:cxnSp>
+        <p:nvCxnSpPr>
+          <p:cNvPr id="48" name="Connector 47"/>
+          <p:cNvCxnSpPr/>
+          <p:nvPr/>
+        </p:nvCxnSpPr>
+        <p:spPr>
+          <a:xfrm>
+            <a:off x="3908425" y="1498600"/>
+            <a:ext cx="0" cy="31750"/>
+          </a:xfrm>
+          <a:prstGeom prst="line">
+            <a:avLst/>
+          </a:prstGeom>
+          <a:ln w="7620">
+            <a:solidFill>
+              <a:srgbClr val="1C1E23"/>
+            </a:solidFill>
+          </a:ln>
+        </p:spPr>
+        <p:style>
+          <a:lnRef idx="2">
+            <a:schemeClr val="accent1"/>
+          </a:lnRef>
+          <a:fillRef idx="0">
+            <a:schemeClr val="accent1"/>
+          </a:fillRef>
+          <a:effectRef idx="1">
+            <a:schemeClr val="accent1"/>
+          </a:effectRef>
+          <a:fontRef idx="minor">
+            <a:schemeClr val="tx1"/>
+          </a:fontRef>
+        </p:style>
+      </p:cxnSp>
+      <p:sp>
+        <p:nvSpPr>
+          <p:cNvPr id="49" name="TextBox 48"/>
+          <p:cNvSpPr txBox="1"/>
+          <p:nvPr/>
+        </p:nvSpPr>
+        <p:spPr>
+          <a:xfrm>
+            <a:off x="2384425" y="1520317"/>
+            <a:ext cx="3048000" cy="164592"/>
+          </a:xfrm>
+          <a:prstGeom prst="rect">
+            <a:avLst/>
+          </a:prstGeom>
+          <a:noFill/>
+        </p:spPr>
+        <p:txBody>
+          <a:bodyPr wrap="none" lIns="0" rIns="0" tIns="0" bIns="0" anchor="ctr">
+            <a:spAutoFit/>
+          </a:bodyPr>
+          <a:lstStyle/>
+          <a:p>
+            <a:pPr algn="ctr"/>
+            <a:r>
+              <a:rPr sz="540" b="0" i="0">
+                <a:solidFill>
+                  <a:srgbClr val="6B727C"/>
+                </a:solidFill>
+                <a:latin typeface="Helvetica"/>
+              </a:rPr>
+              <a:t>4</a:t>
+            </a:r>
+          </a:p>
+        </p:txBody>
+      </p:sp>
+      <p:cxnSp>
+        <p:nvCxnSpPr>
+          <p:cNvPr id="50" name="Connector 49"/>
+          <p:cNvCxnSpPr/>
+          <p:nvPr/>
+        </p:nvCxnSpPr>
+        <p:spPr>
+          <a:xfrm>
+            <a:off x="4117975" y="1498600"/>
+            <a:ext cx="0" cy="31750"/>
+          </a:xfrm>
+          <a:prstGeom prst="line">
+            <a:avLst/>
+          </a:prstGeom>
+          <a:ln w="7620">
+            <a:solidFill>
+              <a:srgbClr val="1C1E23"/>
+            </a:solidFill>
+          </a:ln>
+        </p:spPr>
+        <p:style>
+          <a:lnRef idx="2">
+            <a:schemeClr val="accent1"/>
+          </a:lnRef>
+          <a:fillRef idx="0">
+            <a:schemeClr val="accent1"/>
+          </a:fillRef>
+          <a:effectRef idx="1">
+            <a:schemeClr val="accent1"/>
+          </a:effectRef>
+          <a:fontRef idx="minor">
+            <a:schemeClr val="tx1"/>
+          </a:fontRef>
+        </p:style>
+      </p:cxnSp>
+      <p:sp>
+        <p:nvSpPr>
+          <p:cNvPr id="51" name="TextBox 50"/>
+          <p:cNvSpPr txBox="1"/>
+          <p:nvPr/>
+        </p:nvSpPr>
+        <p:spPr>
+          <a:xfrm>
+            <a:off x="2593975" y="1520317"/>
+            <a:ext cx="3048000" cy="164592"/>
+          </a:xfrm>
+          <a:prstGeom prst="rect">
+            <a:avLst/>
+          </a:prstGeom>
+          <a:noFill/>
+        </p:spPr>
+        <p:txBody>
+          <a:bodyPr wrap="none" lIns="0" rIns="0" tIns="0" bIns="0" anchor="ctr">
+            <a:spAutoFit/>
+          </a:bodyPr>
+          <a:lstStyle/>
+          <a:p>
+            <a:pPr algn="ctr"/>
+            <a:r>
+              <a:rPr sz="540" b="0" i="0">
+                <a:solidFill>
+                  <a:srgbClr val="6B727C"/>
+                </a:solidFill>
+                <a:latin typeface="Helvetica"/>
+              </a:rPr>
+              <a:t>5</a:t>
+            </a:r>
+          </a:p>
+        </p:txBody>
+      </p:sp>
+      <p:cxnSp>
+        <p:nvCxnSpPr>
+          <p:cNvPr id="52" name="Connector 51"/>
+          <p:cNvCxnSpPr/>
+          <p:nvPr/>
+        </p:nvCxnSpPr>
+        <p:spPr>
+          <a:xfrm>
+            <a:off x="4327525" y="1498600"/>
+            <a:ext cx="0" cy="31750"/>
+          </a:xfrm>
+          <a:prstGeom prst="line">
+            <a:avLst/>
+          </a:prstGeom>
+          <a:ln w="7620">
+            <a:solidFill>
+              <a:srgbClr val="1C1E23"/>
+            </a:solidFill>
+          </a:ln>
+        </p:spPr>
+        <p:style>
+          <a:lnRef idx="2">
+            <a:schemeClr val="accent1"/>
+          </a:lnRef>
+          <a:fillRef idx="0">
+            <a:schemeClr val="accent1"/>
+          </a:fillRef>
+          <a:effectRef idx="1">
+            <a:schemeClr val="accent1"/>
+          </a:effectRef>
+          <a:fontRef idx="minor">
+            <a:schemeClr val="tx1"/>
+          </a:fontRef>
+        </p:style>
+      </p:cxnSp>
+      <p:sp>
+        <p:nvSpPr>
+          <p:cNvPr id="53" name="TextBox 52"/>
+          <p:cNvSpPr txBox="1"/>
+          <p:nvPr/>
+        </p:nvSpPr>
+        <p:spPr>
+          <a:xfrm>
+            <a:off x="2803525" y="1520317"/>
+            <a:ext cx="3048000" cy="164592"/>
+          </a:xfrm>
+          <a:prstGeom prst="rect">
+            <a:avLst/>
+          </a:prstGeom>
+          <a:noFill/>
+        </p:spPr>
+        <p:txBody>
+          <a:bodyPr wrap="none" lIns="0" rIns="0" tIns="0" bIns="0" anchor="ctr">
+            <a:spAutoFit/>
+          </a:bodyPr>
+          <a:lstStyle/>
+          <a:p>
+            <a:pPr algn="ctr"/>
+            <a:r>
+              <a:rPr sz="540" b="0" i="0">
+                <a:solidFill>
+                  <a:srgbClr val="6B727C"/>
+                </a:solidFill>
+                <a:latin typeface="Helvetica"/>
+              </a:rPr>
+              <a:t>6</a:t>
+            </a:r>
+          </a:p>
+        </p:txBody>
+      </p:sp>
+      <p:cxnSp>
+        <p:nvCxnSpPr>
+          <p:cNvPr id="54" name="Connector 53"/>
+          <p:cNvCxnSpPr/>
+          <p:nvPr/>
+        </p:nvCxnSpPr>
+        <p:spPr>
+          <a:xfrm>
+            <a:off x="4537075" y="1498600"/>
+            <a:ext cx="0" cy="31750"/>
+          </a:xfrm>
+          <a:prstGeom prst="line">
+            <a:avLst/>
+          </a:prstGeom>
+          <a:ln w="7620">
+            <a:solidFill>
+              <a:srgbClr val="1C1E23"/>
+            </a:solidFill>
+          </a:ln>
+        </p:spPr>
+        <p:style>
+          <a:lnRef idx="2">
+            <a:schemeClr val="accent1"/>
+          </a:lnRef>
+          <a:fillRef idx="0">
+            <a:schemeClr val="accent1"/>
+          </a:fillRef>
+          <a:effectRef idx="1">
+            <a:schemeClr val="accent1"/>
+          </a:effectRef>
+          <a:fontRef idx="minor">
+            <a:schemeClr val="tx1"/>
+          </a:fontRef>
+        </p:style>
+      </p:cxnSp>
+      <p:sp>
+        <p:nvSpPr>
+          <p:cNvPr id="55" name="TextBox 54"/>
+          <p:cNvSpPr txBox="1"/>
+          <p:nvPr/>
+        </p:nvSpPr>
+        <p:spPr>
+          <a:xfrm>
+            <a:off x="3013075" y="1520317"/>
+            <a:ext cx="3048000" cy="164592"/>
+          </a:xfrm>
+          <a:prstGeom prst="rect">
+            <a:avLst/>
+          </a:prstGeom>
+          <a:noFill/>
+        </p:spPr>
+        <p:txBody>
+          <a:bodyPr wrap="none" lIns="0" rIns="0" tIns="0" bIns="0" anchor="ctr">
+            <a:spAutoFit/>
+          </a:bodyPr>
+          <a:lstStyle/>
+          <a:p>
+            <a:pPr algn="ctr"/>
+            <a:r>
+              <a:rPr sz="540" b="0" i="0">
+                <a:solidFill>
+                  <a:srgbClr val="6B727C"/>
+                </a:solidFill>
+                <a:latin typeface="Helvetica"/>
+              </a:rPr>
+              <a:t>7</a:t>
+            </a:r>
+          </a:p>
+        </p:txBody>
+      </p:sp>
+      <p:cxnSp>
+        <p:nvCxnSpPr>
+          <p:cNvPr id="56" name="Connector 55"/>
+          <p:cNvCxnSpPr/>
+          <p:nvPr/>
+        </p:nvCxnSpPr>
+        <p:spPr>
+          <a:xfrm>
+            <a:off x="4746625" y="1498600"/>
+            <a:ext cx="0" cy="31750"/>
+          </a:xfrm>
+          <a:prstGeom prst="line">
+            <a:avLst/>
+          </a:prstGeom>
+          <a:ln w="7620">
+            <a:solidFill>
+              <a:srgbClr val="1C1E23"/>
+            </a:solidFill>
+          </a:ln>
+        </p:spPr>
+        <p:style>
+          <a:lnRef idx="2">
+            <a:schemeClr val="accent1"/>
+          </a:lnRef>
+          <a:fillRef idx="0">
+            <a:schemeClr val="accent1"/>
+          </a:fillRef>
+          <a:effectRef idx="1">
+            <a:schemeClr val="accent1"/>
+          </a:effectRef>
+          <a:fontRef idx="minor">
+            <a:schemeClr val="tx1"/>
+          </a:fontRef>
+        </p:style>
+      </p:cxnSp>
+      <p:sp>
+        <p:nvSpPr>
+          <p:cNvPr id="57" name="TextBox 56"/>
+          <p:cNvSpPr txBox="1"/>
+          <p:nvPr/>
+        </p:nvSpPr>
+        <p:spPr>
+          <a:xfrm>
+            <a:off x="3222625" y="1520317"/>
+            <a:ext cx="3048000" cy="164592"/>
+          </a:xfrm>
+          <a:prstGeom prst="rect">
+            <a:avLst/>
+          </a:prstGeom>
+          <a:noFill/>
+        </p:spPr>
+        <p:txBody>
+          <a:bodyPr wrap="none" lIns="0" rIns="0" tIns="0" bIns="0" anchor="ctr">
+            <a:spAutoFit/>
+          </a:bodyPr>
+          <a:lstStyle/>
+          <a:p>
+            <a:pPr algn="ctr"/>
+            <a:r>
+              <a:rPr sz="540" b="0" i="0">
+                <a:solidFill>
+                  <a:srgbClr val="6B727C"/>
+                </a:solidFill>
+                <a:latin typeface="Helvetica"/>
+              </a:rPr>
+              <a:t>8</a:t>
+            </a:r>
+          </a:p>
+        </p:txBody>
+      </p:sp>
+      <p:cxnSp>
+        <p:nvCxnSpPr>
+          <p:cNvPr id="58" name="Connector 57"/>
+          <p:cNvCxnSpPr/>
+          <p:nvPr/>
+        </p:nvCxnSpPr>
+        <p:spPr>
+          <a:xfrm>
+            <a:off x="3143250" y="1321338"/>
+            <a:ext cx="31750" cy="0"/>
+          </a:xfrm>
+          <a:prstGeom prst="line">
+            <a:avLst/>
+          </a:prstGeom>
+          <a:ln w="7620">
+            <a:solidFill>
+              <a:srgbClr val="1C1E23"/>
+            </a:solidFill>
+          </a:ln>
+        </p:spPr>
+        <p:style>
+          <a:lnRef idx="2">
+            <a:schemeClr val="accent1"/>
+          </a:lnRef>
+          <a:fillRef idx="0">
+            <a:schemeClr val="accent1"/>
+          </a:fillRef>
+          <a:effectRef idx="1">
+            <a:schemeClr val="accent1"/>
+          </a:effectRef>
+          <a:fontRef idx="minor">
+            <a:schemeClr val="tx1"/>
+          </a:fontRef>
+        </p:style>
+      </p:cxnSp>
+      <p:sp>
+        <p:nvSpPr>
+          <p:cNvPr id="59" name="TextBox 58"/>
+          <p:cNvSpPr txBox="1"/>
+          <p:nvPr/>
+        </p:nvSpPr>
+        <p:spPr>
+          <a:xfrm>
+            <a:off x="1605280" y="1252885"/>
+            <a:ext cx="3048000" cy="164592"/>
+          </a:xfrm>
+          <a:prstGeom prst="rect">
+            <a:avLst/>
+          </a:prstGeom>
+          <a:noFill/>
+        </p:spPr>
+        <p:txBody>
+          <a:bodyPr wrap="none" lIns="0" rIns="0" tIns="0" bIns="0" anchor="ctr">
+            <a:spAutoFit/>
+          </a:bodyPr>
+          <a:lstStyle/>
+          <a:p>
+            <a:pPr algn="r"/>
+            <a:r>
+              <a:rPr sz="540" b="0" i="0">
+                <a:solidFill>
+                  <a:srgbClr val="6B727C"/>
+                </a:solidFill>
+                <a:latin typeface="Helvetica"/>
+              </a:rPr>
+              <a:t>-0.30</a:t>
+            </a:r>
+          </a:p>
+        </p:txBody>
+      </p:sp>
+      <p:cxnSp>
+        <p:nvCxnSpPr>
+          <p:cNvPr id="60" name="Connector 59"/>
+          <p:cNvCxnSpPr/>
+          <p:nvPr/>
+        </p:nvCxnSpPr>
+        <p:spPr>
+          <a:xfrm>
+            <a:off x="3143250" y="1239621"/>
+            <a:ext cx="31750" cy="0"/>
+          </a:xfrm>
+          <a:prstGeom prst="line">
+            <a:avLst/>
+          </a:prstGeom>
+          <a:ln w="7620">
+            <a:solidFill>
+              <a:srgbClr val="1C1E23"/>
+            </a:solidFill>
+          </a:ln>
+        </p:spPr>
+        <p:style>
+          <a:lnRef idx="2">
+            <a:schemeClr val="accent1"/>
+          </a:lnRef>
+          <a:fillRef idx="0">
+            <a:schemeClr val="accent1"/>
+          </a:fillRef>
+          <a:effectRef idx="1">
+            <a:schemeClr val="accent1"/>
+          </a:effectRef>
+          <a:fontRef idx="minor">
+            <a:schemeClr val="tx1"/>
+          </a:fontRef>
+        </p:style>
+      </p:cxnSp>
+      <p:sp>
+        <p:nvSpPr>
+          <p:cNvPr id="61" name="TextBox 60"/>
+          <p:cNvSpPr txBox="1"/>
+          <p:nvPr/>
+        </p:nvSpPr>
+        <p:spPr>
+          <a:xfrm>
+            <a:off x="1605280" y="1171168"/>
+            <a:ext cx="3048000" cy="164592"/>
+          </a:xfrm>
+          <a:prstGeom prst="rect">
+            <a:avLst/>
+          </a:prstGeom>
+          <a:noFill/>
+        </p:spPr>
+        <p:txBody>
+          <a:bodyPr wrap="none" lIns="0" rIns="0" tIns="0" bIns="0" anchor="ctr">
+            <a:spAutoFit/>
+          </a:bodyPr>
+          <a:lstStyle/>
+          <a:p>
+            <a:pPr algn="r"/>
+            <a:r>
+              <a:rPr sz="540" b="0" i="0">
+                <a:solidFill>
+                  <a:srgbClr val="6B727C"/>
+                </a:solidFill>
+                <a:latin typeface="Helvetica"/>
+              </a:rPr>
+              <a:t>-0.15</a:t>
+            </a:r>
+          </a:p>
+        </p:txBody>
+      </p:sp>
+      <p:cxnSp>
+        <p:nvCxnSpPr>
+          <p:cNvPr id="62" name="Connector 61"/>
+          <p:cNvCxnSpPr/>
+          <p:nvPr/>
+        </p:nvCxnSpPr>
+        <p:spPr>
+          <a:xfrm>
+            <a:off x="3143250" y="1157905"/>
+            <a:ext cx="31750" cy="0"/>
+          </a:xfrm>
+          <a:prstGeom prst="line">
+            <a:avLst/>
+          </a:prstGeom>
+          <a:ln w="7620">
+            <a:solidFill>
+              <a:srgbClr val="1C1E23"/>
+            </a:solidFill>
+          </a:ln>
+        </p:spPr>
+        <p:style>
+          <a:lnRef idx="2">
+            <a:schemeClr val="accent1"/>
+          </a:lnRef>
+          <a:fillRef idx="0">
+            <a:schemeClr val="accent1"/>
+          </a:fillRef>
+          <a:effectRef idx="1">
+            <a:schemeClr val="accent1"/>
+          </a:effectRef>
+          <a:fontRef idx="minor">
+            <a:schemeClr val="tx1"/>
+          </a:fontRef>
+        </p:style>
+      </p:cxnSp>
+      <p:sp>
+        <p:nvSpPr>
+          <p:cNvPr id="63" name="TextBox 62"/>
+          <p:cNvSpPr txBox="1"/>
+          <p:nvPr/>
+        </p:nvSpPr>
+        <p:spPr>
+          <a:xfrm>
+            <a:off x="1605280" y="1089452"/>
+            <a:ext cx="3048000" cy="164592"/>
+          </a:xfrm>
+          <a:prstGeom prst="rect">
+            <a:avLst/>
+          </a:prstGeom>
+          <a:noFill/>
+        </p:spPr>
+        <p:txBody>
+          <a:bodyPr wrap="none" lIns="0" rIns="0" tIns="0" bIns="0" anchor="ctr">
+            <a:spAutoFit/>
+          </a:bodyPr>
+          <a:lstStyle/>
+          <a:p>
+            <a:pPr algn="r"/>
+            <a:r>
+              <a:rPr sz="540" b="0" i="0">
+                <a:solidFill>
+                  <a:srgbClr val="6B727C"/>
+                </a:solidFill>
+                <a:latin typeface="Helvetica"/>
+              </a:rPr>
+              <a:t>0.00</a:t>
+            </a:r>
+          </a:p>
+        </p:txBody>
+      </p:sp>
+      <p:cxnSp>
+        <p:nvCxnSpPr>
+          <p:cNvPr id="64" name="Connector 63"/>
+          <p:cNvCxnSpPr/>
+          <p:nvPr/>
+        </p:nvCxnSpPr>
+        <p:spPr>
+          <a:xfrm>
+            <a:off x="3143250" y="1076188"/>
+            <a:ext cx="31750" cy="0"/>
+          </a:xfrm>
+          <a:prstGeom prst="line">
+            <a:avLst/>
+          </a:prstGeom>
+          <a:ln w="7620">
+            <a:solidFill>
+              <a:srgbClr val="1C1E23"/>
+            </a:solidFill>
+          </a:ln>
+        </p:spPr>
+        <p:style>
+          <a:lnRef idx="2">
+            <a:schemeClr val="accent1"/>
+          </a:lnRef>
+          <a:fillRef idx="0">
+            <a:schemeClr val="accent1"/>
+          </a:fillRef>
+          <a:effectRef idx="1">
+            <a:schemeClr val="accent1"/>
+          </a:effectRef>
+          <a:fontRef idx="minor">
+            <a:schemeClr val="tx1"/>
+          </a:fontRef>
+        </p:style>
+      </p:cxnSp>
+      <p:sp>
+        <p:nvSpPr>
+          <p:cNvPr id="65" name="TextBox 64"/>
+          <p:cNvSpPr txBox="1"/>
+          <p:nvPr/>
+        </p:nvSpPr>
+        <p:spPr>
+          <a:xfrm>
+            <a:off x="1605280" y="1007735"/>
+            <a:ext cx="3048000" cy="164592"/>
+          </a:xfrm>
+          <a:prstGeom prst="rect">
+            <a:avLst/>
+          </a:prstGeom>
+          <a:noFill/>
+        </p:spPr>
+        <p:txBody>
+          <a:bodyPr wrap="none" lIns="0" rIns="0" tIns="0" bIns="0" anchor="ctr">
+            <a:spAutoFit/>
+          </a:bodyPr>
+          <a:lstStyle/>
+          <a:p>
+            <a:pPr algn="r"/>
+            <a:r>
+              <a:rPr sz="540" b="0" i="0">
+                <a:solidFill>
+                  <a:srgbClr val="6B727C"/>
+                </a:solidFill>
+                <a:latin typeface="Helvetica"/>
+              </a:rPr>
+              <a:t>0.15</a:t>
+            </a:r>
+          </a:p>
+        </p:txBody>
+      </p:sp>
+      <p:sp>
+        <p:nvSpPr>
+          <p:cNvPr id="66" name="TextBox 65"/>
+          <p:cNvSpPr txBox="1"/>
+          <p:nvPr/>
+        </p:nvSpPr>
+        <p:spPr>
+          <a:xfrm>
+            <a:off x="2489200" y="1617980"/>
+            <a:ext cx="3048000" cy="182879"/>
+          </a:xfrm>
+          <a:prstGeom prst="rect">
+            <a:avLst/>
+          </a:prstGeom>
+          <a:noFill/>
+        </p:spPr>
+        <p:txBody>
+          <a:bodyPr wrap="none" lIns="0" rIns="0" tIns="0" bIns="0" anchor="ctr">
+            <a:spAutoFit/>
+          </a:bodyPr>
+          <a:lstStyle/>
+          <a:p>
+            <a:pPr algn="ctr"/>
+            <a:r>
+              <a:rPr sz="600" b="0" i="0">
+                <a:solidFill>
+                  <a:srgbClr val="1C1E23"/>
+                </a:solidFill>
+                <a:latin typeface="Helvetica"/>
+              </a:rPr>
+              <a:t>conservative score, quantile bin</a:t>
+            </a:r>
+          </a:p>
+        </p:txBody>
+      </p:sp>
+      <p:sp>
+        <p:nvSpPr>
+          <p:cNvPr id="67" name="TextBox 66"/>
+          <p:cNvSpPr txBox="1"/>
+          <p:nvPr/>
+        </p:nvSpPr>
+        <p:spPr>
+          <a:xfrm>
+            <a:off x="1612900" y="250317"/>
             <a:ext cx="3048000" cy="164592"/>
           </a:xfrm>
           <a:prstGeom prst="rect">
@@ -3818,21 +5459,2273 @@
                 </a:solidFill>
                 <a:latin typeface="Helvetica"/>
               </a:rPr>
-              <a:t>Harmful loss  HL  (lower is better)</a:t>
-            </a:r>
-          </a:p>
-        </p:txBody>
-      </p:sp>
-      <p:sp>
-        <p:nvSpPr>
-          <p:cNvPr id="23" name="TextBox 22"/>
+              <a:t>realised utility</a:t>
+            </a:r>
+          </a:p>
+        </p:txBody>
+      </p:sp>
+      <p:cxnSp>
+        <p:nvCxnSpPr>
+          <p:cNvPr id="68" name="Connector 67"/>
+          <p:cNvCxnSpPr/>
+          <p:nvPr/>
+        </p:nvCxnSpPr>
+        <p:spPr>
+          <a:xfrm>
+            <a:off x="3175000" y="1157905"/>
+            <a:ext cx="1676400" cy="0"/>
+          </a:xfrm>
+          <a:prstGeom prst="line">
+            <a:avLst/>
+          </a:prstGeom>
+          <a:ln w="7620">
+            <a:solidFill>
+              <a:srgbClr val="CCCED3"/>
+            </a:solidFill>
+            <a:prstDash val="dash"/>
+          </a:ln>
+        </p:spPr>
+        <p:style>
+          <a:lnRef idx="2">
+            <a:schemeClr val="accent1"/>
+          </a:lnRef>
+          <a:fillRef idx="0">
+            <a:schemeClr val="accent1"/>
+          </a:fillRef>
+          <a:effectRef idx="1">
+            <a:schemeClr val="accent1"/>
+          </a:effectRef>
+          <a:fontRef idx="minor">
+            <a:schemeClr val="tx1"/>
+          </a:fontRef>
+        </p:style>
+      </p:cxnSp>
+      <p:cxnSp>
+        <p:nvCxnSpPr>
+          <p:cNvPr id="69" name="Connector 68"/>
+          <p:cNvCxnSpPr/>
+          <p:nvPr/>
+        </p:nvCxnSpPr>
+        <p:spPr>
+          <a:xfrm flipV="1">
+            <a:off x="3233674" y="1263272"/>
+            <a:ext cx="0" cy="159472"/>
+          </a:xfrm>
+          <a:prstGeom prst="line">
+            <a:avLst/>
+          </a:prstGeom>
+          <a:ln w="6350">
+            <a:solidFill>
+              <a:srgbClr val="215499"/>
+            </a:solidFill>
+          </a:ln>
+        </p:spPr>
+        <p:style>
+          <a:lnRef idx="2">
+            <a:schemeClr val="accent1"/>
+          </a:lnRef>
+          <a:fillRef idx="0">
+            <a:schemeClr val="accent1"/>
+          </a:fillRef>
+          <a:effectRef idx="1">
+            <a:schemeClr val="accent1"/>
+          </a:effectRef>
+          <a:fontRef idx="minor">
+            <a:schemeClr val="tx1"/>
+          </a:fontRef>
+        </p:style>
+      </p:cxnSp>
+      <p:cxnSp>
+        <p:nvCxnSpPr>
+          <p:cNvPr id="70" name="Connector 69"/>
+          <p:cNvCxnSpPr/>
+          <p:nvPr/>
+        </p:nvCxnSpPr>
+        <p:spPr>
+          <a:xfrm flipV="1">
+            <a:off x="3443224" y="1130829"/>
+            <a:ext cx="0" cy="24905"/>
+          </a:xfrm>
+          <a:prstGeom prst="line">
+            <a:avLst/>
+          </a:prstGeom>
+          <a:ln w="6350">
+            <a:solidFill>
+              <a:srgbClr val="215499"/>
+            </a:solidFill>
+          </a:ln>
+        </p:spPr>
+        <p:style>
+          <a:lnRef idx="2">
+            <a:schemeClr val="accent1"/>
+          </a:lnRef>
+          <a:fillRef idx="0">
+            <a:schemeClr val="accent1"/>
+          </a:fillRef>
+          <a:effectRef idx="1">
+            <a:schemeClr val="accent1"/>
+          </a:effectRef>
+          <a:fontRef idx="minor">
+            <a:schemeClr val="tx1"/>
+          </a:fontRef>
+        </p:style>
+      </p:cxnSp>
+      <p:cxnSp>
+        <p:nvCxnSpPr>
+          <p:cNvPr id="71" name="Connector 70"/>
+          <p:cNvCxnSpPr/>
+          <p:nvPr/>
+        </p:nvCxnSpPr>
+        <p:spPr>
+          <a:xfrm flipV="1">
+            <a:off x="3652774" y="1147073"/>
+            <a:ext cx="0" cy="20424"/>
+          </a:xfrm>
+          <a:prstGeom prst="line">
+            <a:avLst/>
+          </a:prstGeom>
+          <a:ln w="6350">
+            <a:solidFill>
+              <a:srgbClr val="215499"/>
+            </a:solidFill>
+          </a:ln>
+        </p:spPr>
+        <p:style>
+          <a:lnRef idx="2">
+            <a:schemeClr val="accent1"/>
+          </a:lnRef>
+          <a:fillRef idx="0">
+            <a:schemeClr val="accent1"/>
+          </a:fillRef>
+          <a:effectRef idx="1">
+            <a:schemeClr val="accent1"/>
+          </a:effectRef>
+          <a:fontRef idx="minor">
+            <a:schemeClr val="tx1"/>
+          </a:fontRef>
+        </p:style>
+      </p:cxnSp>
+      <p:cxnSp>
+        <p:nvCxnSpPr>
+          <p:cNvPr id="72" name="Connector 71"/>
+          <p:cNvCxnSpPr/>
+          <p:nvPr/>
+        </p:nvCxnSpPr>
+        <p:spPr>
+          <a:xfrm flipV="1">
+            <a:off x="3862324" y="1145865"/>
+            <a:ext cx="0" cy="19763"/>
+          </a:xfrm>
+          <a:prstGeom prst="line">
+            <a:avLst/>
+          </a:prstGeom>
+          <a:ln w="6350">
+            <a:solidFill>
+              <a:srgbClr val="215499"/>
+            </a:solidFill>
+          </a:ln>
+        </p:spPr>
+        <p:style>
+          <a:lnRef idx="2">
+            <a:schemeClr val="accent1"/>
+          </a:lnRef>
+          <a:fillRef idx="0">
+            <a:schemeClr val="accent1"/>
+          </a:fillRef>
+          <a:effectRef idx="1">
+            <a:schemeClr val="accent1"/>
+          </a:effectRef>
+          <a:fontRef idx="minor">
+            <a:schemeClr val="tx1"/>
+          </a:fontRef>
+        </p:style>
+      </p:cxnSp>
+      <p:cxnSp>
+        <p:nvCxnSpPr>
+          <p:cNvPr id="73" name="Connector 72"/>
+          <p:cNvCxnSpPr/>
+          <p:nvPr/>
+        </p:nvCxnSpPr>
+        <p:spPr>
+          <a:xfrm flipV="1">
+            <a:off x="4071874" y="1145085"/>
+            <a:ext cx="0" cy="21939"/>
+          </a:xfrm>
+          <a:prstGeom prst="line">
+            <a:avLst/>
+          </a:prstGeom>
+          <a:ln w="6350">
+            <a:solidFill>
+              <a:srgbClr val="215499"/>
+            </a:solidFill>
+          </a:ln>
+        </p:spPr>
+        <p:style>
+          <a:lnRef idx="2">
+            <a:schemeClr val="accent1"/>
+          </a:lnRef>
+          <a:fillRef idx="0">
+            <a:schemeClr val="accent1"/>
+          </a:fillRef>
+          <a:effectRef idx="1">
+            <a:schemeClr val="accent1"/>
+          </a:effectRef>
+          <a:fontRef idx="minor">
+            <a:schemeClr val="tx1"/>
+          </a:fontRef>
+        </p:style>
+      </p:cxnSp>
+      <p:cxnSp>
+        <p:nvCxnSpPr>
+          <p:cNvPr id="74" name="Connector 73"/>
+          <p:cNvCxnSpPr/>
+          <p:nvPr/>
+        </p:nvCxnSpPr>
+        <p:spPr>
+          <a:xfrm flipV="1">
+            <a:off x="4281424" y="1131169"/>
+            <a:ext cx="0" cy="32774"/>
+          </a:xfrm>
+          <a:prstGeom prst="line">
+            <a:avLst/>
+          </a:prstGeom>
+          <a:ln w="6350">
+            <a:solidFill>
+              <a:srgbClr val="215499"/>
+            </a:solidFill>
+          </a:ln>
+        </p:spPr>
+        <p:style>
+          <a:lnRef idx="2">
+            <a:schemeClr val="accent1"/>
+          </a:lnRef>
+          <a:fillRef idx="0">
+            <a:schemeClr val="accent1"/>
+          </a:fillRef>
+          <a:effectRef idx="1">
+            <a:schemeClr val="accent1"/>
+          </a:effectRef>
+          <a:fontRef idx="minor">
+            <a:schemeClr val="tx1"/>
+          </a:fontRef>
+        </p:style>
+      </p:cxnSp>
+      <p:cxnSp>
+        <p:nvCxnSpPr>
+          <p:cNvPr id="75" name="Connector 74"/>
+          <p:cNvCxnSpPr/>
+          <p:nvPr/>
+        </p:nvCxnSpPr>
+        <p:spPr>
+          <a:xfrm flipV="1">
+            <a:off x="4490974" y="1113750"/>
+            <a:ext cx="0" cy="55595"/>
+          </a:xfrm>
+          <a:prstGeom prst="line">
+            <a:avLst/>
+          </a:prstGeom>
+          <a:ln w="6350">
+            <a:solidFill>
+              <a:srgbClr val="215499"/>
+            </a:solidFill>
+          </a:ln>
+        </p:spPr>
+        <p:style>
+          <a:lnRef idx="2">
+            <a:schemeClr val="accent1"/>
+          </a:lnRef>
+          <a:fillRef idx="0">
+            <a:schemeClr val="accent1"/>
+          </a:fillRef>
+          <a:effectRef idx="1">
+            <a:schemeClr val="accent1"/>
+          </a:effectRef>
+          <a:fontRef idx="minor">
+            <a:schemeClr val="tx1"/>
+          </a:fontRef>
+        </p:style>
+      </p:cxnSp>
+      <p:cxnSp>
+        <p:nvCxnSpPr>
+          <p:cNvPr id="76" name="Connector 75"/>
+          <p:cNvCxnSpPr/>
+          <p:nvPr/>
+        </p:nvCxnSpPr>
+        <p:spPr>
+          <a:xfrm flipV="1">
+            <a:off x="4700524" y="1039587"/>
+            <a:ext cx="0" cy="87476"/>
+          </a:xfrm>
+          <a:prstGeom prst="line">
+            <a:avLst/>
+          </a:prstGeom>
+          <a:ln w="6350">
+            <a:solidFill>
+              <a:srgbClr val="215499"/>
+            </a:solidFill>
+          </a:ln>
+        </p:spPr>
+        <p:style>
+          <a:lnRef idx="2">
+            <a:schemeClr val="accent1"/>
+          </a:lnRef>
+          <a:fillRef idx="0">
+            <a:schemeClr val="accent1"/>
+          </a:fillRef>
+          <a:effectRef idx="1">
+            <a:schemeClr val="accent1"/>
+          </a:effectRef>
+          <a:fontRef idx="minor">
+            <a:schemeClr val="tx1"/>
+          </a:fontRef>
+        </p:style>
+      </p:cxnSp>
+      <p:sp>
+        <p:nvSpPr>
+          <p:cNvPr id="77" name="Freeform 76"/>
+          <p:cNvSpPr/>
+          <p:nvPr/>
+        </p:nvSpPr>
+        <p:spPr>
+          <a:xfrm>
+            <a:off x="3233674" y="1089145"/>
+            <a:ext cx="1466850" cy="245152"/>
+          </a:xfrm>
+          <a:custGeom>
+            <a:avLst/>
+            <a:gdLst/>
+            <a:ahLst/>
+            <a:cxnLst/>
+            <a:rect l="l" t="t" r="r" b="b"/>
+            <a:pathLst>
+              <a:path w="1466850" h="245152">
+                <a:moveTo>
+                  <a:pt x="0" y="245152"/>
+                </a:moveTo>
+                <a:lnTo>
+                  <a:pt x="209550" y="54684"/>
+                </a:lnTo>
+                <a:lnTo>
+                  <a:pt x="419100" y="67788"/>
+                </a:lnTo>
+                <a:lnTo>
+                  <a:pt x="628650" y="67070"/>
+                </a:lnTo>
+                <a:lnTo>
+                  <a:pt x="838200" y="67124"/>
+                </a:lnTo>
+                <a:lnTo>
+                  <a:pt x="1047750" y="58479"/>
+                </a:lnTo>
+                <a:lnTo>
+                  <a:pt x="1257300" y="51914"/>
+                </a:lnTo>
+                <a:lnTo>
+                  <a:pt x="1466850" y="0"/>
+                </a:lnTo>
+              </a:path>
+            </a:pathLst>
+          </a:custGeom>
+          <a:noFill/>
+          <a:ln w="11430">
+            <a:solidFill>
+              <a:srgbClr val="215499"/>
+            </a:solidFill>
+          </a:ln>
+          <a:effectLst/>
+        </p:spPr>
+        <p:style>
+          <a:lnRef idx="1">
+            <a:schemeClr val="accent1"/>
+          </a:lnRef>
+          <a:fillRef idx="3">
+            <a:schemeClr val="accent1"/>
+          </a:fillRef>
+          <a:effectRef idx="2">
+            <a:schemeClr val="accent1"/>
+          </a:effectRef>
+          <a:fontRef idx="minor">
+            <a:schemeClr val="lt1"/>
+          </a:fontRef>
+        </p:style>
+        <p:txBody>
+          <a:bodyPr rtlCol="0" anchor="ctr"/>
+          <a:lstStyle/>
+          <a:p>
+            <a:pPr algn="ctr"/>
+          </a:p>
+        </p:txBody>
+      </p:sp>
+      <p:sp>
+        <p:nvSpPr>
+          <p:cNvPr id="78" name="Rectangle 77"/>
+          <p:cNvSpPr/>
+          <p:nvPr/>
+        </p:nvSpPr>
+        <p:spPr>
+          <a:xfrm>
+            <a:off x="3219704" y="1320327"/>
+            <a:ext cx="27940" cy="27940"/>
+          </a:xfrm>
+          <a:prstGeom prst="rect">
+            <a:avLst/>
+          </a:prstGeom>
+          <a:solidFill>
+            <a:srgbClr val="215499"/>
+          </a:solidFill>
+          <a:ln w="6350">
+            <a:solidFill>
+              <a:srgbClr val="FFFFFF"/>
+            </a:solidFill>
+          </a:ln>
+          <a:effectLst/>
+        </p:spPr>
+        <p:style>
+          <a:lnRef idx="1">
+            <a:schemeClr val="accent1"/>
+          </a:lnRef>
+          <a:fillRef idx="3">
+            <a:schemeClr val="accent1"/>
+          </a:fillRef>
+          <a:effectRef idx="2">
+            <a:schemeClr val="accent1"/>
+          </a:effectRef>
+          <a:fontRef idx="minor">
+            <a:schemeClr val="lt1"/>
+          </a:fontRef>
+        </p:style>
+        <p:txBody>
+          <a:bodyPr rtlCol="0" anchor="ctr"/>
+          <a:lstStyle/>
+          <a:p>
+            <a:pPr algn="ctr"/>
+          </a:p>
+        </p:txBody>
+      </p:sp>
+      <p:sp>
+        <p:nvSpPr>
+          <p:cNvPr id="79" name="Rectangle 78"/>
+          <p:cNvSpPr/>
+          <p:nvPr/>
+        </p:nvSpPr>
+        <p:spPr>
+          <a:xfrm>
+            <a:off x="3429254" y="1129859"/>
+            <a:ext cx="27940" cy="27940"/>
+          </a:xfrm>
+          <a:prstGeom prst="rect">
+            <a:avLst/>
+          </a:prstGeom>
+          <a:solidFill>
+            <a:srgbClr val="215499"/>
+          </a:solidFill>
+          <a:ln w="6350">
+            <a:solidFill>
+              <a:srgbClr val="FFFFFF"/>
+            </a:solidFill>
+          </a:ln>
+          <a:effectLst/>
+        </p:spPr>
+        <p:style>
+          <a:lnRef idx="1">
+            <a:schemeClr val="accent1"/>
+          </a:lnRef>
+          <a:fillRef idx="3">
+            <a:schemeClr val="accent1"/>
+          </a:fillRef>
+          <a:effectRef idx="2">
+            <a:schemeClr val="accent1"/>
+          </a:effectRef>
+          <a:fontRef idx="minor">
+            <a:schemeClr val="lt1"/>
+          </a:fontRef>
+        </p:style>
+        <p:txBody>
+          <a:bodyPr rtlCol="0" anchor="ctr"/>
+          <a:lstStyle/>
+          <a:p>
+            <a:pPr algn="ctr"/>
+          </a:p>
+        </p:txBody>
+      </p:sp>
+      <p:sp>
+        <p:nvSpPr>
+          <p:cNvPr id="80" name="Rectangle 79"/>
+          <p:cNvSpPr/>
+          <p:nvPr/>
+        </p:nvSpPr>
+        <p:spPr>
+          <a:xfrm>
+            <a:off x="3638804" y="1142963"/>
+            <a:ext cx="27940" cy="27940"/>
+          </a:xfrm>
+          <a:prstGeom prst="rect">
+            <a:avLst/>
+          </a:prstGeom>
+          <a:solidFill>
+            <a:srgbClr val="215499"/>
+          </a:solidFill>
+          <a:ln w="6350">
+            <a:solidFill>
+              <a:srgbClr val="FFFFFF"/>
+            </a:solidFill>
+          </a:ln>
+          <a:effectLst/>
+        </p:spPr>
+        <p:style>
+          <a:lnRef idx="1">
+            <a:schemeClr val="accent1"/>
+          </a:lnRef>
+          <a:fillRef idx="3">
+            <a:schemeClr val="accent1"/>
+          </a:fillRef>
+          <a:effectRef idx="2">
+            <a:schemeClr val="accent1"/>
+          </a:effectRef>
+          <a:fontRef idx="minor">
+            <a:schemeClr val="lt1"/>
+          </a:fontRef>
+        </p:style>
+        <p:txBody>
+          <a:bodyPr rtlCol="0" anchor="ctr"/>
+          <a:lstStyle/>
+          <a:p>
+            <a:pPr algn="ctr"/>
+          </a:p>
+        </p:txBody>
+      </p:sp>
+      <p:sp>
+        <p:nvSpPr>
+          <p:cNvPr id="81" name="Rectangle 80"/>
+          <p:cNvSpPr/>
+          <p:nvPr/>
+        </p:nvSpPr>
+        <p:spPr>
+          <a:xfrm>
+            <a:off x="3848354" y="1142245"/>
+            <a:ext cx="27940" cy="27940"/>
+          </a:xfrm>
+          <a:prstGeom prst="rect">
+            <a:avLst/>
+          </a:prstGeom>
+          <a:solidFill>
+            <a:srgbClr val="215499"/>
+          </a:solidFill>
+          <a:ln w="6350">
+            <a:solidFill>
+              <a:srgbClr val="FFFFFF"/>
+            </a:solidFill>
+          </a:ln>
+          <a:effectLst/>
+        </p:spPr>
+        <p:style>
+          <a:lnRef idx="1">
+            <a:schemeClr val="accent1"/>
+          </a:lnRef>
+          <a:fillRef idx="3">
+            <a:schemeClr val="accent1"/>
+          </a:fillRef>
+          <a:effectRef idx="2">
+            <a:schemeClr val="accent1"/>
+          </a:effectRef>
+          <a:fontRef idx="minor">
+            <a:schemeClr val="lt1"/>
+          </a:fontRef>
+        </p:style>
+        <p:txBody>
+          <a:bodyPr rtlCol="0" anchor="ctr"/>
+          <a:lstStyle/>
+          <a:p>
+            <a:pPr algn="ctr"/>
+          </a:p>
+        </p:txBody>
+      </p:sp>
+      <p:sp>
+        <p:nvSpPr>
+          <p:cNvPr id="82" name="Rectangle 81"/>
+          <p:cNvSpPr/>
+          <p:nvPr/>
+        </p:nvSpPr>
+        <p:spPr>
+          <a:xfrm>
+            <a:off x="4057904" y="1142299"/>
+            <a:ext cx="27940" cy="27940"/>
+          </a:xfrm>
+          <a:prstGeom prst="rect">
+            <a:avLst/>
+          </a:prstGeom>
+          <a:solidFill>
+            <a:srgbClr val="215499"/>
+          </a:solidFill>
+          <a:ln w="6350">
+            <a:solidFill>
+              <a:srgbClr val="FFFFFF"/>
+            </a:solidFill>
+          </a:ln>
+          <a:effectLst/>
+        </p:spPr>
+        <p:style>
+          <a:lnRef idx="1">
+            <a:schemeClr val="accent1"/>
+          </a:lnRef>
+          <a:fillRef idx="3">
+            <a:schemeClr val="accent1"/>
+          </a:fillRef>
+          <a:effectRef idx="2">
+            <a:schemeClr val="accent1"/>
+          </a:effectRef>
+          <a:fontRef idx="minor">
+            <a:schemeClr val="lt1"/>
+          </a:fontRef>
+        </p:style>
+        <p:txBody>
+          <a:bodyPr rtlCol="0" anchor="ctr"/>
+          <a:lstStyle/>
+          <a:p>
+            <a:pPr algn="ctr"/>
+          </a:p>
+        </p:txBody>
+      </p:sp>
+      <p:sp>
+        <p:nvSpPr>
+          <p:cNvPr id="83" name="Rectangle 82"/>
+          <p:cNvSpPr/>
+          <p:nvPr/>
+        </p:nvSpPr>
+        <p:spPr>
+          <a:xfrm>
+            <a:off x="4267454" y="1133654"/>
+            <a:ext cx="27940" cy="27940"/>
+          </a:xfrm>
+          <a:prstGeom prst="rect">
+            <a:avLst/>
+          </a:prstGeom>
+          <a:solidFill>
+            <a:srgbClr val="215499"/>
+          </a:solidFill>
+          <a:ln w="6350">
+            <a:solidFill>
+              <a:srgbClr val="FFFFFF"/>
+            </a:solidFill>
+          </a:ln>
+          <a:effectLst/>
+        </p:spPr>
+        <p:style>
+          <a:lnRef idx="1">
+            <a:schemeClr val="accent1"/>
+          </a:lnRef>
+          <a:fillRef idx="3">
+            <a:schemeClr val="accent1"/>
+          </a:fillRef>
+          <a:effectRef idx="2">
+            <a:schemeClr val="accent1"/>
+          </a:effectRef>
+          <a:fontRef idx="minor">
+            <a:schemeClr val="lt1"/>
+          </a:fontRef>
+        </p:style>
+        <p:txBody>
+          <a:bodyPr rtlCol="0" anchor="ctr"/>
+          <a:lstStyle/>
+          <a:p>
+            <a:pPr algn="ctr"/>
+          </a:p>
+        </p:txBody>
+      </p:sp>
+      <p:sp>
+        <p:nvSpPr>
+          <p:cNvPr id="84" name="Rectangle 83"/>
+          <p:cNvSpPr/>
+          <p:nvPr/>
+        </p:nvSpPr>
+        <p:spPr>
+          <a:xfrm>
+            <a:off x="4477004" y="1127089"/>
+            <a:ext cx="27940" cy="27940"/>
+          </a:xfrm>
+          <a:prstGeom prst="rect">
+            <a:avLst/>
+          </a:prstGeom>
+          <a:solidFill>
+            <a:srgbClr val="215499"/>
+          </a:solidFill>
+          <a:ln w="6350">
+            <a:solidFill>
+              <a:srgbClr val="FFFFFF"/>
+            </a:solidFill>
+          </a:ln>
+          <a:effectLst/>
+        </p:spPr>
+        <p:style>
+          <a:lnRef idx="1">
+            <a:schemeClr val="accent1"/>
+          </a:lnRef>
+          <a:fillRef idx="3">
+            <a:schemeClr val="accent1"/>
+          </a:fillRef>
+          <a:effectRef idx="2">
+            <a:schemeClr val="accent1"/>
+          </a:effectRef>
+          <a:fontRef idx="minor">
+            <a:schemeClr val="lt1"/>
+          </a:fontRef>
+        </p:style>
+        <p:txBody>
+          <a:bodyPr rtlCol="0" anchor="ctr"/>
+          <a:lstStyle/>
+          <a:p>
+            <a:pPr algn="ctr"/>
+          </a:p>
+        </p:txBody>
+      </p:sp>
+      <p:sp>
+        <p:nvSpPr>
+          <p:cNvPr id="85" name="Rectangle 84"/>
+          <p:cNvSpPr/>
+          <p:nvPr/>
+        </p:nvSpPr>
+        <p:spPr>
+          <a:xfrm>
+            <a:off x="4686554" y="1075175"/>
+            <a:ext cx="27940" cy="27940"/>
+          </a:xfrm>
+          <a:prstGeom prst="rect">
+            <a:avLst/>
+          </a:prstGeom>
+          <a:solidFill>
+            <a:srgbClr val="215499"/>
+          </a:solidFill>
+          <a:ln w="6350">
+            <a:solidFill>
+              <a:srgbClr val="FFFFFF"/>
+            </a:solidFill>
+          </a:ln>
+          <a:effectLst/>
+        </p:spPr>
+        <p:style>
+          <a:lnRef idx="1">
+            <a:schemeClr val="accent1"/>
+          </a:lnRef>
+          <a:fillRef idx="3">
+            <a:schemeClr val="accent1"/>
+          </a:fillRef>
+          <a:effectRef idx="2">
+            <a:schemeClr val="accent1"/>
+          </a:effectRef>
+          <a:fontRef idx="minor">
+            <a:schemeClr val="lt1"/>
+          </a:fontRef>
+        </p:style>
+        <p:txBody>
+          <a:bodyPr rtlCol="0" anchor="ctr"/>
+          <a:lstStyle/>
+          <a:p>
+            <a:pPr algn="ctr"/>
+          </a:p>
+        </p:txBody>
+      </p:sp>
+      <p:cxnSp>
+        <p:nvCxnSpPr>
+          <p:cNvPr id="86" name="Connector 85"/>
+          <p:cNvCxnSpPr/>
+          <p:nvPr/>
+        </p:nvCxnSpPr>
+        <p:spPr>
+          <a:xfrm flipV="1">
+            <a:off x="3279775" y="1134024"/>
+            <a:ext cx="0" cy="59100"/>
+          </a:xfrm>
+          <a:prstGeom prst="line">
+            <a:avLst/>
+          </a:prstGeom>
+          <a:ln w="6350">
+            <a:solidFill>
+              <a:srgbClr val="AD6B0A"/>
+            </a:solidFill>
+          </a:ln>
+        </p:spPr>
+        <p:style>
+          <a:lnRef idx="2">
+            <a:schemeClr val="accent1"/>
+          </a:lnRef>
+          <a:fillRef idx="0">
+            <a:schemeClr val="accent1"/>
+          </a:fillRef>
+          <a:effectRef idx="1">
+            <a:schemeClr val="accent1"/>
+          </a:effectRef>
+          <a:fontRef idx="minor">
+            <a:schemeClr val="tx1"/>
+          </a:fontRef>
+        </p:style>
+      </p:cxnSp>
+      <p:cxnSp>
+        <p:nvCxnSpPr>
+          <p:cNvPr id="87" name="Connector 86"/>
+          <p:cNvCxnSpPr/>
+          <p:nvPr/>
+        </p:nvCxnSpPr>
+        <p:spPr>
+          <a:xfrm flipV="1">
+            <a:off x="3489325" y="1137291"/>
+            <a:ext cx="0" cy="30938"/>
+          </a:xfrm>
+          <a:prstGeom prst="line">
+            <a:avLst/>
+          </a:prstGeom>
+          <a:ln w="6350">
+            <a:solidFill>
+              <a:srgbClr val="AD6B0A"/>
+            </a:solidFill>
+          </a:ln>
+        </p:spPr>
+        <p:style>
+          <a:lnRef idx="2">
+            <a:schemeClr val="accent1"/>
+          </a:lnRef>
+          <a:fillRef idx="0">
+            <a:schemeClr val="accent1"/>
+          </a:fillRef>
+          <a:effectRef idx="1">
+            <a:schemeClr val="accent1"/>
+          </a:effectRef>
+          <a:fontRef idx="minor">
+            <a:schemeClr val="tx1"/>
+          </a:fontRef>
+        </p:style>
+      </p:cxnSp>
+      <p:cxnSp>
+        <p:nvCxnSpPr>
+          <p:cNvPr id="88" name="Connector 87"/>
+          <p:cNvCxnSpPr/>
+          <p:nvPr/>
+        </p:nvCxnSpPr>
+        <p:spPr>
+          <a:xfrm flipV="1">
+            <a:off x="3698875" y="1133583"/>
+            <a:ext cx="0" cy="78463"/>
+          </a:xfrm>
+          <a:prstGeom prst="line">
+            <a:avLst/>
+          </a:prstGeom>
+          <a:ln w="6350">
+            <a:solidFill>
+              <a:srgbClr val="AD6B0A"/>
+            </a:solidFill>
+          </a:ln>
+        </p:spPr>
+        <p:style>
+          <a:lnRef idx="2">
+            <a:schemeClr val="accent1"/>
+          </a:lnRef>
+          <a:fillRef idx="0">
+            <a:schemeClr val="accent1"/>
+          </a:fillRef>
+          <a:effectRef idx="1">
+            <a:schemeClr val="accent1"/>
+          </a:effectRef>
+          <a:fontRef idx="minor">
+            <a:schemeClr val="tx1"/>
+          </a:fontRef>
+        </p:style>
+      </p:cxnSp>
+      <p:cxnSp>
+        <p:nvCxnSpPr>
+          <p:cNvPr id="89" name="Connector 88"/>
+          <p:cNvCxnSpPr/>
+          <p:nvPr/>
+        </p:nvCxnSpPr>
+        <p:spPr>
+          <a:xfrm flipV="1">
+            <a:off x="3908425" y="1138302"/>
+            <a:ext cx="0" cy="20944"/>
+          </a:xfrm>
+          <a:prstGeom prst="line">
+            <a:avLst/>
+          </a:prstGeom>
+          <a:ln w="6350">
+            <a:solidFill>
+              <a:srgbClr val="AD6B0A"/>
+            </a:solidFill>
+          </a:ln>
+        </p:spPr>
+        <p:style>
+          <a:lnRef idx="2">
+            <a:schemeClr val="accent1"/>
+          </a:lnRef>
+          <a:fillRef idx="0">
+            <a:schemeClr val="accent1"/>
+          </a:fillRef>
+          <a:effectRef idx="1">
+            <a:schemeClr val="accent1"/>
+          </a:effectRef>
+          <a:fontRef idx="minor">
+            <a:schemeClr val="tx1"/>
+          </a:fontRef>
+        </p:style>
+      </p:cxnSp>
+      <p:cxnSp>
+        <p:nvCxnSpPr>
+          <p:cNvPr id="90" name="Connector 89"/>
+          <p:cNvCxnSpPr/>
+          <p:nvPr/>
+        </p:nvCxnSpPr>
+        <p:spPr>
+          <a:xfrm flipV="1">
+            <a:off x="4117975" y="1154659"/>
+            <a:ext cx="0" cy="14471"/>
+          </a:xfrm>
+          <a:prstGeom prst="line">
+            <a:avLst/>
+          </a:prstGeom>
+          <a:ln w="6350">
+            <a:solidFill>
+              <a:srgbClr val="AD6B0A"/>
+            </a:solidFill>
+          </a:ln>
+        </p:spPr>
+        <p:style>
+          <a:lnRef idx="2">
+            <a:schemeClr val="accent1"/>
+          </a:lnRef>
+          <a:fillRef idx="0">
+            <a:schemeClr val="accent1"/>
+          </a:fillRef>
+          <a:effectRef idx="1">
+            <a:schemeClr val="accent1"/>
+          </a:effectRef>
+          <a:fontRef idx="minor">
+            <a:schemeClr val="tx1"/>
+          </a:fontRef>
+        </p:style>
+      </p:cxnSp>
+      <p:cxnSp>
+        <p:nvCxnSpPr>
+          <p:cNvPr id="91" name="Connector 90"/>
+          <p:cNvCxnSpPr/>
+          <p:nvPr/>
+        </p:nvCxnSpPr>
+        <p:spPr>
+          <a:xfrm flipV="1">
+            <a:off x="4327525" y="1155991"/>
+            <a:ext cx="0" cy="22919"/>
+          </a:xfrm>
+          <a:prstGeom prst="line">
+            <a:avLst/>
+          </a:prstGeom>
+          <a:ln w="6350">
+            <a:solidFill>
+              <a:srgbClr val="AD6B0A"/>
+            </a:solidFill>
+          </a:ln>
+        </p:spPr>
+        <p:style>
+          <a:lnRef idx="2">
+            <a:schemeClr val="accent1"/>
+          </a:lnRef>
+          <a:fillRef idx="0">
+            <a:schemeClr val="accent1"/>
+          </a:fillRef>
+          <a:effectRef idx="1">
+            <a:schemeClr val="accent1"/>
+          </a:effectRef>
+          <a:fontRef idx="minor">
+            <a:schemeClr val="tx1"/>
+          </a:fontRef>
+        </p:style>
+      </p:cxnSp>
+      <p:cxnSp>
+        <p:nvCxnSpPr>
+          <p:cNvPr id="92" name="Connector 91"/>
+          <p:cNvCxnSpPr/>
+          <p:nvPr/>
+        </p:nvCxnSpPr>
+        <p:spPr>
+          <a:xfrm flipV="1">
+            <a:off x="4537075" y="969248"/>
+            <a:ext cx="0" cy="152925"/>
+          </a:xfrm>
+          <a:prstGeom prst="line">
+            <a:avLst/>
+          </a:prstGeom>
+          <a:ln w="6350">
+            <a:solidFill>
+              <a:srgbClr val="AD6B0A"/>
+            </a:solidFill>
+          </a:ln>
+        </p:spPr>
+        <p:style>
+          <a:lnRef idx="2">
+            <a:schemeClr val="accent1"/>
+          </a:lnRef>
+          <a:fillRef idx="0">
+            <a:schemeClr val="accent1"/>
+          </a:fillRef>
+          <a:effectRef idx="1">
+            <a:schemeClr val="accent1"/>
+          </a:effectRef>
+          <a:fontRef idx="minor">
+            <a:schemeClr val="tx1"/>
+          </a:fontRef>
+        </p:style>
+      </p:cxnSp>
+      <p:cxnSp>
+        <p:nvCxnSpPr>
+          <p:cNvPr id="93" name="Connector 92"/>
+          <p:cNvCxnSpPr/>
+          <p:nvPr/>
+        </p:nvCxnSpPr>
+        <p:spPr>
+          <a:xfrm flipV="1">
+            <a:off x="4746625" y="481724"/>
+            <a:ext cx="0" cy="409353"/>
+          </a:xfrm>
+          <a:prstGeom prst="line">
+            <a:avLst/>
+          </a:prstGeom>
+          <a:ln w="6350">
+            <a:solidFill>
+              <a:srgbClr val="AD6B0A"/>
+            </a:solidFill>
+          </a:ln>
+        </p:spPr>
+        <p:style>
+          <a:lnRef idx="2">
+            <a:schemeClr val="accent1"/>
+          </a:lnRef>
+          <a:fillRef idx="0">
+            <a:schemeClr val="accent1"/>
+          </a:fillRef>
+          <a:effectRef idx="1">
+            <a:schemeClr val="accent1"/>
+          </a:effectRef>
+          <a:fontRef idx="minor">
+            <a:schemeClr val="tx1"/>
+          </a:fontRef>
+        </p:style>
+      </p:cxnSp>
+      <p:sp>
+        <p:nvSpPr>
+          <p:cNvPr id="94" name="Freeform 93"/>
+          <p:cNvSpPr/>
+          <p:nvPr/>
+        </p:nvSpPr>
+        <p:spPr>
+          <a:xfrm>
+            <a:off x="3279775" y="712325"/>
+            <a:ext cx="1466850" cy="454687"/>
+          </a:xfrm>
+          <a:custGeom>
+            <a:avLst/>
+            <a:gdLst/>
+            <a:ahLst/>
+            <a:cxnLst/>
+            <a:rect l="l" t="t" r="r" b="b"/>
+            <a:pathLst>
+              <a:path w="1466850" h="454687">
+                <a:moveTo>
+                  <a:pt x="0" y="451967"/>
+                </a:moveTo>
+                <a:lnTo>
+                  <a:pt x="209550" y="441797"/>
+                </a:lnTo>
+                <a:lnTo>
+                  <a:pt x="419100" y="454687"/>
+                </a:lnTo>
+                <a:lnTo>
+                  <a:pt x="628650" y="437090"/>
+                </a:lnTo>
+                <a:lnTo>
+                  <a:pt x="838200" y="448814"/>
+                </a:lnTo>
+                <a:lnTo>
+                  <a:pt x="1047750" y="454151"/>
+                </a:lnTo>
+                <a:lnTo>
+                  <a:pt x="1257300" y="340448"/>
+                </a:lnTo>
+                <a:lnTo>
+                  <a:pt x="1466850" y="0"/>
+                </a:lnTo>
+              </a:path>
+            </a:pathLst>
+          </a:custGeom>
+          <a:noFill/>
+          <a:ln w="11430">
+            <a:solidFill>
+              <a:srgbClr val="AD6B0A"/>
+            </a:solidFill>
+          </a:ln>
+          <a:effectLst/>
+        </p:spPr>
+        <p:style>
+          <a:lnRef idx="1">
+            <a:schemeClr val="accent1"/>
+          </a:lnRef>
+          <a:fillRef idx="3">
+            <a:schemeClr val="accent1"/>
+          </a:fillRef>
+          <a:effectRef idx="2">
+            <a:schemeClr val="accent1"/>
+          </a:effectRef>
+          <a:fontRef idx="minor">
+            <a:schemeClr val="lt1"/>
+          </a:fontRef>
+        </p:style>
+        <p:txBody>
+          <a:bodyPr rtlCol="0" anchor="ctr"/>
+          <a:lstStyle/>
+          <a:p>
+            <a:pPr algn="ctr"/>
+          </a:p>
+        </p:txBody>
+      </p:sp>
+      <p:sp>
+        <p:nvSpPr>
+          <p:cNvPr id="95" name="Rectangle 94"/>
+          <p:cNvSpPr/>
+          <p:nvPr/>
+        </p:nvSpPr>
+        <p:spPr>
+          <a:xfrm>
+            <a:off x="3265804" y="1150322"/>
+            <a:ext cx="27940" cy="27940"/>
+          </a:xfrm>
+          <a:prstGeom prst="rect">
+            <a:avLst/>
+          </a:prstGeom>
+          <a:solidFill>
+            <a:srgbClr val="AD6B0A"/>
+          </a:solidFill>
+          <a:ln w="6350">
+            <a:solidFill>
+              <a:srgbClr val="FFFFFF"/>
+            </a:solidFill>
+          </a:ln>
+          <a:effectLst/>
+        </p:spPr>
+        <p:style>
+          <a:lnRef idx="1">
+            <a:schemeClr val="accent1"/>
+          </a:lnRef>
+          <a:fillRef idx="3">
+            <a:schemeClr val="accent1"/>
+          </a:fillRef>
+          <a:effectRef idx="2">
+            <a:schemeClr val="accent1"/>
+          </a:effectRef>
+          <a:fontRef idx="minor">
+            <a:schemeClr val="lt1"/>
+          </a:fontRef>
+        </p:style>
+        <p:txBody>
+          <a:bodyPr rtlCol="0" anchor="ctr"/>
+          <a:lstStyle/>
+          <a:p>
+            <a:pPr algn="ctr"/>
+          </a:p>
+        </p:txBody>
+      </p:sp>
+      <p:sp>
+        <p:nvSpPr>
+          <p:cNvPr id="96" name="Rectangle 95"/>
+          <p:cNvSpPr/>
+          <p:nvPr/>
+        </p:nvSpPr>
+        <p:spPr>
+          <a:xfrm>
+            <a:off x="3475354" y="1140152"/>
+            <a:ext cx="27940" cy="27940"/>
+          </a:xfrm>
+          <a:prstGeom prst="rect">
+            <a:avLst/>
+          </a:prstGeom>
+          <a:solidFill>
+            <a:srgbClr val="AD6B0A"/>
+          </a:solidFill>
+          <a:ln w="6350">
+            <a:solidFill>
+              <a:srgbClr val="FFFFFF"/>
+            </a:solidFill>
+          </a:ln>
+          <a:effectLst/>
+        </p:spPr>
+        <p:style>
+          <a:lnRef idx="1">
+            <a:schemeClr val="accent1"/>
+          </a:lnRef>
+          <a:fillRef idx="3">
+            <a:schemeClr val="accent1"/>
+          </a:fillRef>
+          <a:effectRef idx="2">
+            <a:schemeClr val="accent1"/>
+          </a:effectRef>
+          <a:fontRef idx="minor">
+            <a:schemeClr val="lt1"/>
+          </a:fontRef>
+        </p:style>
+        <p:txBody>
+          <a:bodyPr rtlCol="0" anchor="ctr"/>
+          <a:lstStyle/>
+          <a:p>
+            <a:pPr algn="ctr"/>
+          </a:p>
+        </p:txBody>
+      </p:sp>
+      <p:sp>
+        <p:nvSpPr>
+          <p:cNvPr id="97" name="Rectangle 96"/>
+          <p:cNvSpPr/>
+          <p:nvPr/>
+        </p:nvSpPr>
+        <p:spPr>
+          <a:xfrm>
+            <a:off x="3684904" y="1153042"/>
+            <a:ext cx="27940" cy="27940"/>
+          </a:xfrm>
+          <a:prstGeom prst="rect">
+            <a:avLst/>
+          </a:prstGeom>
+          <a:solidFill>
+            <a:srgbClr val="AD6B0A"/>
+          </a:solidFill>
+          <a:ln w="6350">
+            <a:solidFill>
+              <a:srgbClr val="FFFFFF"/>
+            </a:solidFill>
+          </a:ln>
+          <a:effectLst/>
+        </p:spPr>
+        <p:style>
+          <a:lnRef idx="1">
+            <a:schemeClr val="accent1"/>
+          </a:lnRef>
+          <a:fillRef idx="3">
+            <a:schemeClr val="accent1"/>
+          </a:fillRef>
+          <a:effectRef idx="2">
+            <a:schemeClr val="accent1"/>
+          </a:effectRef>
+          <a:fontRef idx="minor">
+            <a:schemeClr val="lt1"/>
+          </a:fontRef>
+        </p:style>
+        <p:txBody>
+          <a:bodyPr rtlCol="0" anchor="ctr"/>
+          <a:lstStyle/>
+          <a:p>
+            <a:pPr algn="ctr"/>
+          </a:p>
+        </p:txBody>
+      </p:sp>
+      <p:sp>
+        <p:nvSpPr>
+          <p:cNvPr id="98" name="Rectangle 97"/>
+          <p:cNvSpPr/>
+          <p:nvPr/>
+        </p:nvSpPr>
+        <p:spPr>
+          <a:xfrm>
+            <a:off x="3894454" y="1135445"/>
+            <a:ext cx="27940" cy="27940"/>
+          </a:xfrm>
+          <a:prstGeom prst="rect">
+            <a:avLst/>
+          </a:prstGeom>
+          <a:solidFill>
+            <a:srgbClr val="AD6B0A"/>
+          </a:solidFill>
+          <a:ln w="6350">
+            <a:solidFill>
+              <a:srgbClr val="FFFFFF"/>
+            </a:solidFill>
+          </a:ln>
+          <a:effectLst/>
+        </p:spPr>
+        <p:style>
+          <a:lnRef idx="1">
+            <a:schemeClr val="accent1"/>
+          </a:lnRef>
+          <a:fillRef idx="3">
+            <a:schemeClr val="accent1"/>
+          </a:fillRef>
+          <a:effectRef idx="2">
+            <a:schemeClr val="accent1"/>
+          </a:effectRef>
+          <a:fontRef idx="minor">
+            <a:schemeClr val="lt1"/>
+          </a:fontRef>
+        </p:style>
+        <p:txBody>
+          <a:bodyPr rtlCol="0" anchor="ctr"/>
+          <a:lstStyle/>
+          <a:p>
+            <a:pPr algn="ctr"/>
+          </a:p>
+        </p:txBody>
+      </p:sp>
+      <p:sp>
+        <p:nvSpPr>
+          <p:cNvPr id="99" name="Rectangle 98"/>
+          <p:cNvSpPr/>
+          <p:nvPr/>
+        </p:nvSpPr>
+        <p:spPr>
+          <a:xfrm>
+            <a:off x="4104004" y="1147169"/>
+            <a:ext cx="27940" cy="27940"/>
+          </a:xfrm>
+          <a:prstGeom prst="rect">
+            <a:avLst/>
+          </a:prstGeom>
+          <a:solidFill>
+            <a:srgbClr val="AD6B0A"/>
+          </a:solidFill>
+          <a:ln w="6350">
+            <a:solidFill>
+              <a:srgbClr val="FFFFFF"/>
+            </a:solidFill>
+          </a:ln>
+          <a:effectLst/>
+        </p:spPr>
+        <p:style>
+          <a:lnRef idx="1">
+            <a:schemeClr val="accent1"/>
+          </a:lnRef>
+          <a:fillRef idx="3">
+            <a:schemeClr val="accent1"/>
+          </a:fillRef>
+          <a:effectRef idx="2">
+            <a:schemeClr val="accent1"/>
+          </a:effectRef>
+          <a:fontRef idx="minor">
+            <a:schemeClr val="lt1"/>
+          </a:fontRef>
+        </p:style>
+        <p:txBody>
+          <a:bodyPr rtlCol="0" anchor="ctr"/>
+          <a:lstStyle/>
+          <a:p>
+            <a:pPr algn="ctr"/>
+          </a:p>
+        </p:txBody>
+      </p:sp>
+      <p:sp>
+        <p:nvSpPr>
+          <p:cNvPr id="100" name="Rectangle 99"/>
+          <p:cNvSpPr/>
+          <p:nvPr/>
+        </p:nvSpPr>
+        <p:spPr>
+          <a:xfrm>
+            <a:off x="4313555" y="1152506"/>
+            <a:ext cx="27940" cy="27940"/>
+          </a:xfrm>
+          <a:prstGeom prst="rect">
+            <a:avLst/>
+          </a:prstGeom>
+          <a:solidFill>
+            <a:srgbClr val="AD6B0A"/>
+          </a:solidFill>
+          <a:ln w="6350">
+            <a:solidFill>
+              <a:srgbClr val="FFFFFF"/>
+            </a:solidFill>
+          </a:ln>
+          <a:effectLst/>
+        </p:spPr>
+        <p:style>
+          <a:lnRef idx="1">
+            <a:schemeClr val="accent1"/>
+          </a:lnRef>
+          <a:fillRef idx="3">
+            <a:schemeClr val="accent1"/>
+          </a:fillRef>
+          <a:effectRef idx="2">
+            <a:schemeClr val="accent1"/>
+          </a:effectRef>
+          <a:fontRef idx="minor">
+            <a:schemeClr val="lt1"/>
+          </a:fontRef>
+        </p:style>
+        <p:txBody>
+          <a:bodyPr rtlCol="0" anchor="ctr"/>
+          <a:lstStyle/>
+          <a:p>
+            <a:pPr algn="ctr"/>
+          </a:p>
+        </p:txBody>
+      </p:sp>
+      <p:sp>
+        <p:nvSpPr>
+          <p:cNvPr id="101" name="Rectangle 100"/>
+          <p:cNvSpPr/>
+          <p:nvPr/>
+        </p:nvSpPr>
+        <p:spPr>
+          <a:xfrm>
+            <a:off x="4523105" y="1038803"/>
+            <a:ext cx="27940" cy="27940"/>
+          </a:xfrm>
+          <a:prstGeom prst="rect">
+            <a:avLst/>
+          </a:prstGeom>
+          <a:solidFill>
+            <a:srgbClr val="AD6B0A"/>
+          </a:solidFill>
+          <a:ln w="6350">
+            <a:solidFill>
+              <a:srgbClr val="FFFFFF"/>
+            </a:solidFill>
+          </a:ln>
+          <a:effectLst/>
+        </p:spPr>
+        <p:style>
+          <a:lnRef idx="1">
+            <a:schemeClr val="accent1"/>
+          </a:lnRef>
+          <a:fillRef idx="3">
+            <a:schemeClr val="accent1"/>
+          </a:fillRef>
+          <a:effectRef idx="2">
+            <a:schemeClr val="accent1"/>
+          </a:effectRef>
+          <a:fontRef idx="minor">
+            <a:schemeClr val="lt1"/>
+          </a:fontRef>
+        </p:style>
+        <p:txBody>
+          <a:bodyPr rtlCol="0" anchor="ctr"/>
+          <a:lstStyle/>
+          <a:p>
+            <a:pPr algn="ctr"/>
+          </a:p>
+        </p:txBody>
+      </p:sp>
+      <p:sp>
+        <p:nvSpPr>
+          <p:cNvPr id="102" name="Rectangle 101"/>
+          <p:cNvSpPr/>
+          <p:nvPr/>
+        </p:nvSpPr>
+        <p:spPr>
+          <a:xfrm>
+            <a:off x="4732655" y="698355"/>
+            <a:ext cx="27940" cy="27940"/>
+          </a:xfrm>
+          <a:prstGeom prst="rect">
+            <a:avLst/>
+          </a:prstGeom>
+          <a:solidFill>
+            <a:srgbClr val="AD6B0A"/>
+          </a:solidFill>
+          <a:ln w="6350">
+            <a:solidFill>
+              <a:srgbClr val="FFFFFF"/>
+            </a:solidFill>
+          </a:ln>
+          <a:effectLst/>
+        </p:spPr>
+        <p:style>
+          <a:lnRef idx="1">
+            <a:schemeClr val="accent1"/>
+          </a:lnRef>
+          <a:fillRef idx="3">
+            <a:schemeClr val="accent1"/>
+          </a:fillRef>
+          <a:effectRef idx="2">
+            <a:schemeClr val="accent1"/>
+          </a:effectRef>
+          <a:fontRef idx="minor">
+            <a:schemeClr val="lt1"/>
+          </a:fontRef>
+        </p:style>
+        <p:txBody>
+          <a:bodyPr rtlCol="0" anchor="ctr"/>
+          <a:lstStyle/>
+          <a:p>
+            <a:pPr algn="ctr"/>
+          </a:p>
+        </p:txBody>
+      </p:sp>
+      <p:cxnSp>
+        <p:nvCxnSpPr>
+          <p:cNvPr id="103" name="Connector 102"/>
+          <p:cNvCxnSpPr/>
+          <p:nvPr/>
+        </p:nvCxnSpPr>
+        <p:spPr>
+          <a:xfrm flipV="1">
+            <a:off x="3325876" y="1264955"/>
+            <a:ext cx="0" cy="158320"/>
+          </a:xfrm>
+          <a:prstGeom prst="line">
+            <a:avLst/>
+          </a:prstGeom>
+          <a:ln w="6350">
+            <a:solidFill>
+              <a:srgbClr val="19704F"/>
+            </a:solidFill>
+          </a:ln>
+        </p:spPr>
+        <p:style>
+          <a:lnRef idx="2">
+            <a:schemeClr val="accent1"/>
+          </a:lnRef>
+          <a:fillRef idx="0">
+            <a:schemeClr val="accent1"/>
+          </a:fillRef>
+          <a:effectRef idx="1">
+            <a:schemeClr val="accent1"/>
+          </a:effectRef>
+          <a:fontRef idx="minor">
+            <a:schemeClr val="tx1"/>
+          </a:fontRef>
+        </p:style>
+      </p:cxnSp>
+      <p:cxnSp>
+        <p:nvCxnSpPr>
+          <p:cNvPr id="104" name="Connector 103"/>
+          <p:cNvCxnSpPr/>
+          <p:nvPr/>
+        </p:nvCxnSpPr>
+        <p:spPr>
+          <a:xfrm flipV="1">
+            <a:off x="3535426" y="1137805"/>
+            <a:ext cx="0" cy="73216"/>
+          </a:xfrm>
+          <a:prstGeom prst="line">
+            <a:avLst/>
+          </a:prstGeom>
+          <a:ln w="6350">
+            <a:solidFill>
+              <a:srgbClr val="19704F"/>
+            </a:solidFill>
+          </a:ln>
+        </p:spPr>
+        <p:style>
+          <a:lnRef idx="2">
+            <a:schemeClr val="accent1"/>
+          </a:lnRef>
+          <a:fillRef idx="0">
+            <a:schemeClr val="accent1"/>
+          </a:fillRef>
+          <a:effectRef idx="1">
+            <a:schemeClr val="accent1"/>
+          </a:effectRef>
+          <a:fontRef idx="minor">
+            <a:schemeClr val="tx1"/>
+          </a:fontRef>
+        </p:style>
+      </p:cxnSp>
+      <p:cxnSp>
+        <p:nvCxnSpPr>
+          <p:cNvPr id="105" name="Connector 104"/>
+          <p:cNvCxnSpPr/>
+          <p:nvPr/>
+        </p:nvCxnSpPr>
+        <p:spPr>
+          <a:xfrm flipV="1">
+            <a:off x="3744976" y="1122885"/>
+            <a:ext cx="0" cy="38116"/>
+          </a:xfrm>
+          <a:prstGeom prst="line">
+            <a:avLst/>
+          </a:prstGeom>
+          <a:ln w="6350">
+            <a:solidFill>
+              <a:srgbClr val="19704F"/>
+            </a:solidFill>
+          </a:ln>
+        </p:spPr>
+        <p:style>
+          <a:lnRef idx="2">
+            <a:schemeClr val="accent1"/>
+          </a:lnRef>
+          <a:fillRef idx="0">
+            <a:schemeClr val="accent1"/>
+          </a:fillRef>
+          <a:effectRef idx="1">
+            <a:schemeClr val="accent1"/>
+          </a:effectRef>
+          <a:fontRef idx="minor">
+            <a:schemeClr val="tx1"/>
+          </a:fontRef>
+        </p:style>
+      </p:cxnSp>
+      <p:cxnSp>
+        <p:nvCxnSpPr>
+          <p:cNvPr id="106" name="Connector 105"/>
+          <p:cNvCxnSpPr/>
+          <p:nvPr/>
+        </p:nvCxnSpPr>
+        <p:spPr>
+          <a:xfrm flipV="1">
+            <a:off x="3954526" y="1140361"/>
+            <a:ext cx="0" cy="32161"/>
+          </a:xfrm>
+          <a:prstGeom prst="line">
+            <a:avLst/>
+          </a:prstGeom>
+          <a:ln w="6350">
+            <a:solidFill>
+              <a:srgbClr val="19704F"/>
+            </a:solidFill>
+          </a:ln>
+        </p:spPr>
+        <p:style>
+          <a:lnRef idx="2">
+            <a:schemeClr val="accent1"/>
+          </a:lnRef>
+          <a:fillRef idx="0">
+            <a:schemeClr val="accent1"/>
+          </a:fillRef>
+          <a:effectRef idx="1">
+            <a:schemeClr val="accent1"/>
+          </a:effectRef>
+          <a:fontRef idx="minor">
+            <a:schemeClr val="tx1"/>
+          </a:fontRef>
+        </p:style>
+      </p:cxnSp>
+      <p:cxnSp>
+        <p:nvCxnSpPr>
+          <p:cNvPr id="107" name="Connector 106"/>
+          <p:cNvCxnSpPr/>
+          <p:nvPr/>
+        </p:nvCxnSpPr>
+        <p:spPr>
+          <a:xfrm flipV="1">
+            <a:off x="4164076" y="1113747"/>
+            <a:ext cx="0" cy="38097"/>
+          </a:xfrm>
+          <a:prstGeom prst="line">
+            <a:avLst/>
+          </a:prstGeom>
+          <a:ln w="6350">
+            <a:solidFill>
+              <a:srgbClr val="19704F"/>
+            </a:solidFill>
+          </a:ln>
+        </p:spPr>
+        <p:style>
+          <a:lnRef idx="2">
+            <a:schemeClr val="accent1"/>
+          </a:lnRef>
+          <a:fillRef idx="0">
+            <a:schemeClr val="accent1"/>
+          </a:fillRef>
+          <a:effectRef idx="1">
+            <a:schemeClr val="accent1"/>
+          </a:effectRef>
+          <a:fontRef idx="minor">
+            <a:schemeClr val="tx1"/>
+          </a:fontRef>
+        </p:style>
+      </p:cxnSp>
+      <p:cxnSp>
+        <p:nvCxnSpPr>
+          <p:cNvPr id="108" name="Connector 107"/>
+          <p:cNvCxnSpPr/>
+          <p:nvPr/>
+        </p:nvCxnSpPr>
+        <p:spPr>
+          <a:xfrm flipV="1">
+            <a:off x="4373626" y="1113102"/>
+            <a:ext cx="0" cy="41623"/>
+          </a:xfrm>
+          <a:prstGeom prst="line">
+            <a:avLst/>
+          </a:prstGeom>
+          <a:ln w="6350">
+            <a:solidFill>
+              <a:srgbClr val="19704F"/>
+            </a:solidFill>
+          </a:ln>
+        </p:spPr>
+        <p:style>
+          <a:lnRef idx="2">
+            <a:schemeClr val="accent1"/>
+          </a:lnRef>
+          <a:fillRef idx="0">
+            <a:schemeClr val="accent1"/>
+          </a:fillRef>
+          <a:effectRef idx="1">
+            <a:schemeClr val="accent1"/>
+          </a:effectRef>
+          <a:fontRef idx="minor">
+            <a:schemeClr val="tx1"/>
+          </a:fontRef>
+        </p:style>
+      </p:cxnSp>
+      <p:cxnSp>
+        <p:nvCxnSpPr>
+          <p:cNvPr id="109" name="Connector 108"/>
+          <p:cNvCxnSpPr/>
+          <p:nvPr/>
+        </p:nvCxnSpPr>
+        <p:spPr>
+          <a:xfrm flipV="1">
+            <a:off x="4583176" y="1099926"/>
+            <a:ext cx="0" cy="63362"/>
+          </a:xfrm>
+          <a:prstGeom prst="line">
+            <a:avLst/>
+          </a:prstGeom>
+          <a:ln w="6350">
+            <a:solidFill>
+              <a:srgbClr val="19704F"/>
+            </a:solidFill>
+          </a:ln>
+        </p:spPr>
+        <p:style>
+          <a:lnRef idx="2">
+            <a:schemeClr val="accent1"/>
+          </a:lnRef>
+          <a:fillRef idx="0">
+            <a:schemeClr val="accent1"/>
+          </a:fillRef>
+          <a:effectRef idx="1">
+            <a:schemeClr val="accent1"/>
+          </a:effectRef>
+          <a:fontRef idx="minor">
+            <a:schemeClr val="tx1"/>
+          </a:fontRef>
+        </p:style>
+      </p:cxnSp>
+      <p:cxnSp>
+        <p:nvCxnSpPr>
+          <p:cNvPr id="110" name="Connector 109"/>
+          <p:cNvCxnSpPr/>
+          <p:nvPr/>
+        </p:nvCxnSpPr>
+        <p:spPr>
+          <a:xfrm flipV="1">
+            <a:off x="4792726" y="947873"/>
+            <a:ext cx="0" cy="205207"/>
+          </a:xfrm>
+          <a:prstGeom prst="line">
+            <a:avLst/>
+          </a:prstGeom>
+          <a:ln w="6350">
+            <a:solidFill>
+              <a:srgbClr val="19704F"/>
+            </a:solidFill>
+          </a:ln>
+        </p:spPr>
+        <p:style>
+          <a:lnRef idx="2">
+            <a:schemeClr val="accent1"/>
+          </a:lnRef>
+          <a:fillRef idx="0">
+            <a:schemeClr val="accent1"/>
+          </a:fillRef>
+          <a:effectRef idx="1">
+            <a:schemeClr val="accent1"/>
+          </a:effectRef>
+          <a:fontRef idx="minor">
+            <a:schemeClr val="tx1"/>
+          </a:fontRef>
+        </p:style>
+      </p:cxnSp>
+      <p:sp>
+        <p:nvSpPr>
+          <p:cNvPr id="111" name="Freeform 110"/>
+          <p:cNvSpPr/>
+          <p:nvPr/>
+        </p:nvSpPr>
+        <p:spPr>
+          <a:xfrm>
+            <a:off x="3325876" y="1063184"/>
+            <a:ext cx="1466850" cy="283872"/>
+          </a:xfrm>
+          <a:custGeom>
+            <a:avLst/>
+            <a:gdLst/>
+            <a:ahLst/>
+            <a:cxnLst/>
+            <a:rect l="l" t="t" r="r" b="b"/>
+            <a:pathLst>
+              <a:path w="1466850" h="283872">
+                <a:moveTo>
+                  <a:pt x="0" y="283872"/>
+                </a:moveTo>
+                <a:lnTo>
+                  <a:pt x="209550" y="107989"/>
+                </a:lnTo>
+                <a:lnTo>
+                  <a:pt x="419100" y="80073"/>
+                </a:lnTo>
+                <a:lnTo>
+                  <a:pt x="628650" y="92874"/>
+                </a:lnTo>
+                <a:lnTo>
+                  <a:pt x="838200" y="70138"/>
+                </a:lnTo>
+                <a:lnTo>
+                  <a:pt x="1047750" y="71938"/>
+                </a:lnTo>
+                <a:lnTo>
+                  <a:pt x="1257300" y="73222"/>
+                </a:lnTo>
+                <a:lnTo>
+                  <a:pt x="1466850" y="0"/>
+                </a:lnTo>
+              </a:path>
+            </a:pathLst>
+          </a:custGeom>
+          <a:noFill/>
+          <a:ln w="11430">
+            <a:solidFill>
+              <a:srgbClr val="19704F"/>
+            </a:solidFill>
+          </a:ln>
+          <a:effectLst/>
+        </p:spPr>
+        <p:style>
+          <a:lnRef idx="1">
+            <a:schemeClr val="accent1"/>
+          </a:lnRef>
+          <a:fillRef idx="3">
+            <a:schemeClr val="accent1"/>
+          </a:fillRef>
+          <a:effectRef idx="2">
+            <a:schemeClr val="accent1"/>
+          </a:effectRef>
+          <a:fontRef idx="minor">
+            <a:schemeClr val="lt1"/>
+          </a:fontRef>
+        </p:style>
+        <p:txBody>
+          <a:bodyPr rtlCol="0" anchor="ctr"/>
+          <a:lstStyle/>
+          <a:p>
+            <a:pPr algn="ctr"/>
+          </a:p>
+        </p:txBody>
+      </p:sp>
+      <p:sp>
+        <p:nvSpPr>
+          <p:cNvPr id="112" name="Rectangle 111"/>
+          <p:cNvSpPr/>
+          <p:nvPr/>
+        </p:nvSpPr>
+        <p:spPr>
+          <a:xfrm>
+            <a:off x="3311905" y="1333086"/>
+            <a:ext cx="27940" cy="27940"/>
+          </a:xfrm>
+          <a:prstGeom prst="rect">
+            <a:avLst/>
+          </a:prstGeom>
+          <a:solidFill>
+            <a:srgbClr val="19704F"/>
+          </a:solidFill>
+          <a:ln w="6350">
+            <a:solidFill>
+              <a:srgbClr val="FFFFFF"/>
+            </a:solidFill>
+          </a:ln>
+          <a:effectLst/>
+        </p:spPr>
+        <p:style>
+          <a:lnRef idx="1">
+            <a:schemeClr val="accent1"/>
+          </a:lnRef>
+          <a:fillRef idx="3">
+            <a:schemeClr val="accent1"/>
+          </a:fillRef>
+          <a:effectRef idx="2">
+            <a:schemeClr val="accent1"/>
+          </a:effectRef>
+          <a:fontRef idx="minor">
+            <a:schemeClr val="lt1"/>
+          </a:fontRef>
+        </p:style>
+        <p:txBody>
+          <a:bodyPr rtlCol="0" anchor="ctr"/>
+          <a:lstStyle/>
+          <a:p>
+            <a:pPr algn="ctr"/>
+          </a:p>
+        </p:txBody>
+      </p:sp>
+      <p:sp>
+        <p:nvSpPr>
+          <p:cNvPr id="113" name="Rectangle 112"/>
+          <p:cNvSpPr/>
+          <p:nvPr/>
+        </p:nvSpPr>
+        <p:spPr>
+          <a:xfrm>
+            <a:off x="3521455" y="1157203"/>
+            <a:ext cx="27940" cy="27940"/>
+          </a:xfrm>
+          <a:prstGeom prst="rect">
+            <a:avLst/>
+          </a:prstGeom>
+          <a:solidFill>
+            <a:srgbClr val="19704F"/>
+          </a:solidFill>
+          <a:ln w="6350">
+            <a:solidFill>
+              <a:srgbClr val="FFFFFF"/>
+            </a:solidFill>
+          </a:ln>
+          <a:effectLst/>
+        </p:spPr>
+        <p:style>
+          <a:lnRef idx="1">
+            <a:schemeClr val="accent1"/>
+          </a:lnRef>
+          <a:fillRef idx="3">
+            <a:schemeClr val="accent1"/>
+          </a:fillRef>
+          <a:effectRef idx="2">
+            <a:schemeClr val="accent1"/>
+          </a:effectRef>
+          <a:fontRef idx="minor">
+            <a:schemeClr val="lt1"/>
+          </a:fontRef>
+        </p:style>
+        <p:txBody>
+          <a:bodyPr rtlCol="0" anchor="ctr"/>
+          <a:lstStyle/>
+          <a:p>
+            <a:pPr algn="ctr"/>
+          </a:p>
+        </p:txBody>
+      </p:sp>
+      <p:sp>
+        <p:nvSpPr>
+          <p:cNvPr id="114" name="Rectangle 113"/>
+          <p:cNvSpPr/>
+          <p:nvPr/>
+        </p:nvSpPr>
+        <p:spPr>
+          <a:xfrm>
+            <a:off x="3731005" y="1129287"/>
+            <a:ext cx="27940" cy="27940"/>
+          </a:xfrm>
+          <a:prstGeom prst="rect">
+            <a:avLst/>
+          </a:prstGeom>
+          <a:solidFill>
+            <a:srgbClr val="19704F"/>
+          </a:solidFill>
+          <a:ln w="6350">
+            <a:solidFill>
+              <a:srgbClr val="FFFFFF"/>
+            </a:solidFill>
+          </a:ln>
+          <a:effectLst/>
+        </p:spPr>
+        <p:style>
+          <a:lnRef idx="1">
+            <a:schemeClr val="accent1"/>
+          </a:lnRef>
+          <a:fillRef idx="3">
+            <a:schemeClr val="accent1"/>
+          </a:fillRef>
+          <a:effectRef idx="2">
+            <a:schemeClr val="accent1"/>
+          </a:effectRef>
+          <a:fontRef idx="minor">
+            <a:schemeClr val="lt1"/>
+          </a:fontRef>
+        </p:style>
+        <p:txBody>
+          <a:bodyPr rtlCol="0" anchor="ctr"/>
+          <a:lstStyle/>
+          <a:p>
+            <a:pPr algn="ctr"/>
+          </a:p>
+        </p:txBody>
+      </p:sp>
+      <p:sp>
+        <p:nvSpPr>
+          <p:cNvPr id="115" name="Rectangle 114"/>
+          <p:cNvSpPr/>
+          <p:nvPr/>
+        </p:nvSpPr>
+        <p:spPr>
+          <a:xfrm>
+            <a:off x="3940555" y="1142088"/>
+            <a:ext cx="27940" cy="27940"/>
+          </a:xfrm>
+          <a:prstGeom prst="rect">
+            <a:avLst/>
+          </a:prstGeom>
+          <a:solidFill>
+            <a:srgbClr val="19704F"/>
+          </a:solidFill>
+          <a:ln w="6350">
+            <a:solidFill>
+              <a:srgbClr val="FFFFFF"/>
+            </a:solidFill>
+          </a:ln>
+          <a:effectLst/>
+        </p:spPr>
+        <p:style>
+          <a:lnRef idx="1">
+            <a:schemeClr val="accent1"/>
+          </a:lnRef>
+          <a:fillRef idx="3">
+            <a:schemeClr val="accent1"/>
+          </a:fillRef>
+          <a:effectRef idx="2">
+            <a:schemeClr val="accent1"/>
+          </a:effectRef>
+          <a:fontRef idx="minor">
+            <a:schemeClr val="lt1"/>
+          </a:fontRef>
+        </p:style>
+        <p:txBody>
+          <a:bodyPr rtlCol="0" anchor="ctr"/>
+          <a:lstStyle/>
+          <a:p>
+            <a:pPr algn="ctr"/>
+          </a:p>
+        </p:txBody>
+      </p:sp>
+      <p:sp>
+        <p:nvSpPr>
+          <p:cNvPr id="116" name="Rectangle 115"/>
+          <p:cNvSpPr/>
+          <p:nvPr/>
+        </p:nvSpPr>
+        <p:spPr>
+          <a:xfrm>
+            <a:off x="4150105" y="1119352"/>
+            <a:ext cx="27940" cy="27940"/>
+          </a:xfrm>
+          <a:prstGeom prst="rect">
+            <a:avLst/>
+          </a:prstGeom>
+          <a:solidFill>
+            <a:srgbClr val="19704F"/>
+          </a:solidFill>
+          <a:ln w="6350">
+            <a:solidFill>
+              <a:srgbClr val="FFFFFF"/>
+            </a:solidFill>
+          </a:ln>
+          <a:effectLst/>
+        </p:spPr>
+        <p:style>
+          <a:lnRef idx="1">
+            <a:schemeClr val="accent1"/>
+          </a:lnRef>
+          <a:fillRef idx="3">
+            <a:schemeClr val="accent1"/>
+          </a:fillRef>
+          <a:effectRef idx="2">
+            <a:schemeClr val="accent1"/>
+          </a:effectRef>
+          <a:fontRef idx="minor">
+            <a:schemeClr val="lt1"/>
+          </a:fontRef>
+        </p:style>
+        <p:txBody>
+          <a:bodyPr rtlCol="0" anchor="ctr"/>
+          <a:lstStyle/>
+          <a:p>
+            <a:pPr algn="ctr"/>
+          </a:p>
+        </p:txBody>
+      </p:sp>
+      <p:sp>
+        <p:nvSpPr>
+          <p:cNvPr id="117" name="Rectangle 116"/>
+          <p:cNvSpPr/>
+          <p:nvPr/>
+        </p:nvSpPr>
+        <p:spPr>
+          <a:xfrm>
+            <a:off x="4359656" y="1121152"/>
+            <a:ext cx="27940" cy="27940"/>
+          </a:xfrm>
+          <a:prstGeom prst="rect">
+            <a:avLst/>
+          </a:prstGeom>
+          <a:solidFill>
+            <a:srgbClr val="19704F"/>
+          </a:solidFill>
+          <a:ln w="6350">
+            <a:solidFill>
+              <a:srgbClr val="FFFFFF"/>
+            </a:solidFill>
+          </a:ln>
+          <a:effectLst/>
+        </p:spPr>
+        <p:style>
+          <a:lnRef idx="1">
+            <a:schemeClr val="accent1"/>
+          </a:lnRef>
+          <a:fillRef idx="3">
+            <a:schemeClr val="accent1"/>
+          </a:fillRef>
+          <a:effectRef idx="2">
+            <a:schemeClr val="accent1"/>
+          </a:effectRef>
+          <a:fontRef idx="minor">
+            <a:schemeClr val="lt1"/>
+          </a:fontRef>
+        </p:style>
+        <p:txBody>
+          <a:bodyPr rtlCol="0" anchor="ctr"/>
+          <a:lstStyle/>
+          <a:p>
+            <a:pPr algn="ctr"/>
+          </a:p>
+        </p:txBody>
+      </p:sp>
+      <p:sp>
+        <p:nvSpPr>
+          <p:cNvPr id="118" name="Rectangle 117"/>
+          <p:cNvSpPr/>
+          <p:nvPr/>
+        </p:nvSpPr>
+        <p:spPr>
+          <a:xfrm>
+            <a:off x="4569206" y="1122436"/>
+            <a:ext cx="27940" cy="27940"/>
+          </a:xfrm>
+          <a:prstGeom prst="rect">
+            <a:avLst/>
+          </a:prstGeom>
+          <a:solidFill>
+            <a:srgbClr val="19704F"/>
+          </a:solidFill>
+          <a:ln w="6350">
+            <a:solidFill>
+              <a:srgbClr val="FFFFFF"/>
+            </a:solidFill>
+          </a:ln>
+          <a:effectLst/>
+        </p:spPr>
+        <p:style>
+          <a:lnRef idx="1">
+            <a:schemeClr val="accent1"/>
+          </a:lnRef>
+          <a:fillRef idx="3">
+            <a:schemeClr val="accent1"/>
+          </a:fillRef>
+          <a:effectRef idx="2">
+            <a:schemeClr val="accent1"/>
+          </a:effectRef>
+          <a:fontRef idx="minor">
+            <a:schemeClr val="lt1"/>
+          </a:fontRef>
+        </p:style>
+        <p:txBody>
+          <a:bodyPr rtlCol="0" anchor="ctr"/>
+          <a:lstStyle/>
+          <a:p>
+            <a:pPr algn="ctr"/>
+          </a:p>
+        </p:txBody>
+      </p:sp>
+      <p:sp>
+        <p:nvSpPr>
+          <p:cNvPr id="119" name="Rectangle 118"/>
+          <p:cNvSpPr/>
+          <p:nvPr/>
+        </p:nvSpPr>
+        <p:spPr>
+          <a:xfrm>
+            <a:off x="4778756" y="1049214"/>
+            <a:ext cx="27940" cy="27940"/>
+          </a:xfrm>
+          <a:prstGeom prst="rect">
+            <a:avLst/>
+          </a:prstGeom>
+          <a:solidFill>
+            <a:srgbClr val="19704F"/>
+          </a:solidFill>
+          <a:ln w="6350">
+            <a:solidFill>
+              <a:srgbClr val="FFFFFF"/>
+            </a:solidFill>
+          </a:ln>
+          <a:effectLst/>
+        </p:spPr>
+        <p:style>
+          <a:lnRef idx="1">
+            <a:schemeClr val="accent1"/>
+          </a:lnRef>
+          <a:fillRef idx="3">
+            <a:schemeClr val="accent1"/>
+          </a:fillRef>
+          <a:effectRef idx="2">
+            <a:schemeClr val="accent1"/>
+          </a:effectRef>
+          <a:fontRef idx="minor">
+            <a:schemeClr val="lt1"/>
+          </a:fontRef>
+        </p:style>
+        <p:txBody>
+          <a:bodyPr rtlCol="0" anchor="ctr"/>
+          <a:lstStyle/>
+          <a:p>
+            <a:pPr algn="ctr"/>
+          </a:p>
+        </p:txBody>
+      </p:sp>
+      <p:sp>
+        <p:nvSpPr>
+          <p:cNvPr id="120" name="Rectangle 119"/>
+          <p:cNvSpPr/>
+          <p:nvPr/>
+        </p:nvSpPr>
+        <p:spPr>
+          <a:xfrm>
+            <a:off x="3251200" y="177800"/>
+            <a:ext cx="50800" cy="50800"/>
+          </a:xfrm>
+          <a:prstGeom prst="rect">
+            <a:avLst/>
+          </a:prstGeom>
+          <a:solidFill>
+            <a:srgbClr val="215499"/>
+          </a:solidFill>
+          <a:ln>
+            <a:noFill/>
+          </a:ln>
+          <a:effectLst/>
+        </p:spPr>
+        <p:style>
+          <a:lnRef idx="1">
+            <a:schemeClr val="accent1"/>
+          </a:lnRef>
+          <a:fillRef idx="3">
+            <a:schemeClr val="accent1"/>
+          </a:fillRef>
+          <a:effectRef idx="2">
+            <a:schemeClr val="accent1"/>
+          </a:effectRef>
+          <a:fontRef idx="minor">
+            <a:schemeClr val="lt1"/>
+          </a:fontRef>
+        </p:style>
+        <p:txBody>
+          <a:bodyPr rtlCol="0" anchor="ctr"/>
+          <a:lstStyle/>
+          <a:p>
+            <a:pPr algn="ctr"/>
+          </a:p>
+        </p:txBody>
+      </p:sp>
+      <p:sp>
+        <p:nvSpPr>
+          <p:cNvPr id="121" name="TextBox 120"/>
           <p:cNvSpPr txBox="1"/>
           <p:nvPr/>
         </p:nvSpPr>
         <p:spPr>
           <a:xfrm>
-            <a:off x="-101600" y="865759"/>
-            <a:ext cx="3048000" cy="176784"/>
+            <a:off x="1803400" y="142875"/>
+            <a:ext cx="3048000" cy="152400"/>
           </a:xfrm>
           <a:prstGeom prst="rect">
             <a:avLst/>
@@ -3845,169 +7738,73 @@
           </a:bodyPr>
           <a:lstStyle/>
           <a:p>
-            <a:pPr algn="ctr"/>
-            <a:r>
-              <a:rPr sz="580" b="0" i="0">
-                <a:solidFill>
-                  <a:srgbClr val="AD2B2B"/>
-                </a:solidFill>
-                <a:latin typeface="Helvetica"/>
-              </a:rPr>
-              <a:t>[FIG-HARMFUL-LOSS-BARS]</a:t>
-            </a:r>
-          </a:p>
-        </p:txBody>
-      </p:sp>
-      <p:sp>
-        <p:nvSpPr>
-          <p:cNvPr id="24" name="TextBox 23"/>
-          <p:cNvSpPr txBox="1"/>
-          <p:nvPr/>
-        </p:nvSpPr>
-        <p:spPr>
-          <a:xfrm>
-            <a:off x="1092200" y="11429"/>
-            <a:ext cx="3048000" cy="182879"/>
-          </a:xfrm>
-          <a:prstGeom prst="rect">
-            <a:avLst/>
-          </a:prstGeom>
-          <a:noFill/>
-        </p:spPr>
-        <p:txBody>
-          <a:bodyPr wrap="none" lIns="0" rIns="0" tIns="0" bIns="0" anchor="ctr">
-            <a:spAutoFit/>
-          </a:bodyPr>
-          <a:lstStyle/>
-          <a:p>
             <a:pPr algn="l"/>
             <a:r>
-              <a:rPr sz="600" b="1" i="0">
+              <a:rPr sz="500" b="0" i="0">
                 <a:solidFill>
                   <a:srgbClr val="1C1E23"/>
                 </a:solidFill>
                 <a:latin typeface="Helvetica"/>
               </a:rPr>
-              <a:t>(b) Predicted vs realised ranking utility</a:t>
-            </a:r>
-          </a:p>
-        </p:txBody>
-      </p:sp>
-      <p:cxnSp>
-        <p:nvCxnSpPr>
-          <p:cNvPr id="25" name="Connector 24"/>
-          <p:cNvCxnSpPr/>
-          <p:nvPr/>
-        </p:nvCxnSpPr>
-        <p:spPr>
-          <a:xfrm>
-            <a:off x="3200400" y="1549400"/>
-            <a:ext cx="1676400" cy="0"/>
-          </a:xfrm>
-          <a:prstGeom prst="line">
-            <a:avLst/>
-          </a:prstGeom>
-          <a:ln w="8890">
-            <a:solidFill>
-              <a:srgbClr val="1C1E23"/>
-            </a:solidFill>
-          </a:ln>
-        </p:spPr>
-        <p:style>
-          <a:lnRef idx="2">
-            <a:schemeClr val="accent1"/>
-          </a:lnRef>
-          <a:fillRef idx="0">
-            <a:schemeClr val="accent1"/>
-          </a:fillRef>
-          <a:effectRef idx="1">
-            <a:schemeClr val="accent1"/>
-          </a:effectRef>
-          <a:fontRef idx="minor">
-            <a:schemeClr val="tx1"/>
-          </a:fontRef>
-        </p:style>
-      </p:cxnSp>
-      <p:cxnSp>
-        <p:nvCxnSpPr>
-          <p:cNvPr id="26" name="Connector 25"/>
-          <p:cNvCxnSpPr/>
-          <p:nvPr/>
-        </p:nvCxnSpPr>
-        <p:spPr>
-          <a:xfrm>
-            <a:off x="3200400" y="381000"/>
-            <a:ext cx="0" cy="1168400"/>
-          </a:xfrm>
-          <a:prstGeom prst="line">
-            <a:avLst/>
-          </a:prstGeom>
-          <a:ln w="8890">
-            <a:solidFill>
-              <a:srgbClr val="1C1E23"/>
-            </a:solidFill>
-          </a:ln>
-        </p:spPr>
-        <p:style>
-          <a:lnRef idx="2">
-            <a:schemeClr val="accent1"/>
-          </a:lnRef>
-          <a:fillRef idx="0">
-            <a:schemeClr val="accent1"/>
-          </a:fillRef>
-          <a:effectRef idx="1">
-            <a:schemeClr val="accent1"/>
-          </a:effectRef>
-          <a:fontRef idx="minor">
-            <a:schemeClr val="tx1"/>
-          </a:fontRef>
-        </p:style>
-      </p:cxnSp>
-      <p:cxnSp>
-        <p:nvCxnSpPr>
-          <p:cNvPr id="27" name="Connector 26"/>
-          <p:cNvCxnSpPr/>
-          <p:nvPr/>
-        </p:nvCxnSpPr>
-        <p:spPr>
-          <a:xfrm>
-            <a:off x="3200400" y="1549400"/>
-            <a:ext cx="0" cy="31750"/>
-          </a:xfrm>
-          <a:prstGeom prst="line">
-            <a:avLst/>
-          </a:prstGeom>
-          <a:ln w="7620">
-            <a:solidFill>
-              <a:srgbClr val="1C1E23"/>
-            </a:solidFill>
-          </a:ln>
-        </p:spPr>
-        <p:style>
-          <a:lnRef idx="2">
-            <a:schemeClr val="accent1"/>
-          </a:lnRef>
-          <a:fillRef idx="0">
-            <a:schemeClr val="accent1"/>
-          </a:fillRef>
-          <a:effectRef idx="1">
-            <a:schemeClr val="accent1"/>
-          </a:effectRef>
-          <a:fontRef idx="minor">
-            <a:schemeClr val="tx1"/>
-          </a:fontRef>
-        </p:style>
-      </p:cxnSp>
-      <p:sp>
-        <p:nvSpPr>
-          <p:cNvPr id="28" name="TextBox 27"/>
+              <a:t>Bolt</a:t>
+            </a:r>
+          </a:p>
+        </p:txBody>
+      </p:sp>
+      <p:sp>
+        <p:nvSpPr>
+          <p:cNvPr id="122" name="Rectangle 121"/>
+          <p:cNvSpPr/>
+          <p:nvPr/>
+        </p:nvSpPr>
+        <p:spPr>
+          <a:xfrm>
+            <a:off x="3810000" y="177800"/>
+            <a:ext cx="50800" cy="50800"/>
+          </a:xfrm>
+          <a:prstGeom prst="rect">
+            <a:avLst/>
+          </a:prstGeom>
+          <a:solidFill>
+            <a:srgbClr val="AD6B0A"/>
+          </a:solidFill>
+          <a:ln>
+            <a:noFill/>
+          </a:ln>
+          <a:effectLst/>
+        </p:spPr>
+        <p:style>
+          <a:lnRef idx="1">
+            <a:schemeClr val="accent1"/>
+          </a:lnRef>
+          <a:fillRef idx="3">
+            <a:schemeClr val="accent1"/>
+          </a:fillRef>
+          <a:effectRef idx="2">
+            <a:schemeClr val="accent1"/>
+          </a:effectRef>
+          <a:fontRef idx="minor">
+            <a:schemeClr val="lt1"/>
+          </a:fontRef>
+        </p:style>
+        <p:txBody>
+          <a:bodyPr rtlCol="0" anchor="ctr"/>
+          <a:lstStyle/>
+          <a:p>
+            <a:pPr algn="ctr"/>
+          </a:p>
+        </p:txBody>
+      </p:sp>
+      <p:sp>
+        <p:nvSpPr>
+          <p:cNvPr id="123" name="TextBox 122"/>
           <p:cNvSpPr txBox="1"/>
           <p:nvPr/>
         </p:nvSpPr>
         <p:spPr>
           <a:xfrm>
-            <a:off x="1676400" y="1571117"/>
-            <a:ext cx="3048000" cy="164592"/>
+            <a:off x="2362200" y="142875"/>
+            <a:ext cx="3048000" cy="152400"/>
           </a:xfrm>
           <a:prstGeom prst="rect">
             <a:avLst/>
@@ -4020,64 +7817,143 @@
           </a:bodyPr>
           <a:lstStyle/>
           <a:p>
+            <a:pPr algn="l"/>
+            <a:r>
+              <a:rPr sz="500" b="0" i="0">
+                <a:solidFill>
+                  <a:srgbClr val="1C1E23"/>
+                </a:solidFill>
+                <a:latin typeface="Helvetica"/>
+              </a:rPr>
+              <a:t>TimesFM</a:t>
+            </a:r>
+          </a:p>
+        </p:txBody>
+      </p:sp>
+      <p:sp>
+        <p:nvSpPr>
+          <p:cNvPr id="124" name="Rectangle 123"/>
+          <p:cNvSpPr/>
+          <p:nvPr/>
+        </p:nvSpPr>
+        <p:spPr>
+          <a:xfrm>
+            <a:off x="4368800" y="177800"/>
+            <a:ext cx="50800" cy="50800"/>
+          </a:xfrm>
+          <a:prstGeom prst="rect">
+            <a:avLst/>
+          </a:prstGeom>
+          <a:solidFill>
+            <a:srgbClr val="19704F"/>
+          </a:solidFill>
+          <a:ln>
+            <a:noFill/>
+          </a:ln>
+          <a:effectLst/>
+        </p:spPr>
+        <p:style>
+          <a:lnRef idx="1">
+            <a:schemeClr val="accent1"/>
+          </a:lnRef>
+          <a:fillRef idx="3">
+            <a:schemeClr val="accent1"/>
+          </a:fillRef>
+          <a:effectRef idx="2">
+            <a:schemeClr val="accent1"/>
+          </a:effectRef>
+          <a:fontRef idx="minor">
+            <a:schemeClr val="lt1"/>
+          </a:fontRef>
+        </p:style>
+        <p:txBody>
+          <a:bodyPr rtlCol="0" anchor="ctr"/>
+          <a:lstStyle/>
+          <a:p>
             <a:pPr algn="ctr"/>
-            <a:r>
-              <a:rPr sz="540" b="0" i="0">
+          </a:p>
+        </p:txBody>
+      </p:sp>
+      <p:sp>
+        <p:nvSpPr>
+          <p:cNvPr id="125" name="TextBox 124"/>
+          <p:cNvSpPr txBox="1"/>
+          <p:nvPr/>
+        </p:nvSpPr>
+        <p:spPr>
+          <a:xfrm>
+            <a:off x="2921000" y="142875"/>
+            <a:ext cx="3048000" cy="152400"/>
+          </a:xfrm>
+          <a:prstGeom prst="rect">
+            <a:avLst/>
+          </a:prstGeom>
+          <a:noFill/>
+        </p:spPr>
+        <p:txBody>
+          <a:bodyPr wrap="none" lIns="0" rIns="0" tIns="0" bIns="0" anchor="ctr">
+            <a:spAutoFit/>
+          </a:bodyPr>
+          <a:lstStyle/>
+          <a:p>
+            <a:pPr algn="l"/>
+            <a:r>
+              <a:rPr sz="500" b="0" i="0">
+                <a:solidFill>
+                  <a:srgbClr val="1C1E23"/>
+                </a:solidFill>
+                <a:latin typeface="Helvetica"/>
+              </a:rPr>
+              <a:t>Chronos-2</a:t>
+            </a:r>
+          </a:p>
+        </p:txBody>
+      </p:sp>
+      <p:sp>
+        <p:nvSpPr>
+          <p:cNvPr id="126" name="TextBox 125"/>
+          <p:cNvSpPr txBox="1"/>
+          <p:nvPr/>
+        </p:nvSpPr>
+        <p:spPr>
+          <a:xfrm>
+            <a:off x="2489200" y="1749933"/>
+            <a:ext cx="3048000" cy="140208"/>
+          </a:xfrm>
+          <a:prstGeom prst="rect">
+            <a:avLst/>
+          </a:prstGeom>
+          <a:noFill/>
+        </p:spPr>
+        <p:txBody>
+          <a:bodyPr wrap="none" lIns="0" rIns="0" tIns="0" bIns="0" anchor="ctr">
+            <a:spAutoFit/>
+          </a:bodyPr>
+          <a:lstStyle/>
+          <a:p>
+            <a:pPr algn="ctr"/>
+            <a:r>
+              <a:rPr sz="459" b="0" i="0">
                 <a:solidFill>
                   <a:srgbClr val="6B727C"/>
                 </a:solidFill>
                 <a:latin typeface="Helvetica"/>
               </a:rPr>
-              <a:t>neg</a:t>
-            </a:r>
-          </a:p>
-        </p:txBody>
-      </p:sp>
-      <p:cxnSp>
-        <p:nvCxnSpPr>
-          <p:cNvPr id="29" name="Connector 28"/>
-          <p:cNvCxnSpPr/>
-          <p:nvPr/>
-        </p:nvCxnSpPr>
-        <p:spPr>
-          <a:xfrm>
-            <a:off x="4038600" y="1549400"/>
-            <a:ext cx="0" cy="31750"/>
-          </a:xfrm>
-          <a:prstGeom prst="line">
-            <a:avLst/>
-          </a:prstGeom>
-          <a:ln w="7620">
-            <a:solidFill>
-              <a:srgbClr val="1C1E23"/>
-            </a:solidFill>
-          </a:ln>
-        </p:spPr>
-        <p:style>
-          <a:lnRef idx="2">
-            <a:schemeClr val="accent1"/>
-          </a:lnRef>
-          <a:fillRef idx="0">
-            <a:schemeClr val="accent1"/>
-          </a:fillRef>
-          <a:effectRef idx="1">
-            <a:schemeClr val="accent1"/>
-          </a:effectRef>
-          <a:fontRef idx="minor">
-            <a:schemeClr val="tx1"/>
-          </a:fontRef>
-        </p:style>
-      </p:cxnSp>
-      <p:sp>
-        <p:nvSpPr>
-          <p:cNvPr id="30" name="TextBox 29"/>
+              <a:t>whiskers are 95% intervals that resample parents</a:t>
+            </a:r>
+          </a:p>
+        </p:txBody>
+      </p:sp>
+      <p:sp>
+        <p:nvSpPr>
+          <p:cNvPr id="127" name="TextBox 126"/>
           <p:cNvSpPr txBox="1"/>
           <p:nvPr/>
         </p:nvSpPr>
         <p:spPr>
           <a:xfrm>
-            <a:off x="2514600" y="1571117"/>
-            <a:ext cx="3048000" cy="164592"/>
+            <a:off x="990600" y="1895475"/>
+            <a:ext cx="3048000" cy="152400"/>
           </a:xfrm>
           <a:prstGeom prst="rect">
             <a:avLst/>
@@ -4092,504 +7968,13 @@
           <a:p>
             <a:pPr algn="ctr"/>
             <a:r>
-              <a:rPr sz="540" b="0" i="0">
+              <a:rPr sz="500" b="0" i="0">
                 <a:solidFill>
                   <a:srgbClr val="6B727C"/>
                 </a:solidFill>
                 <a:latin typeface="Helvetica"/>
               </a:rPr>
-              <a:t>0</a:t>
-            </a:r>
-          </a:p>
-        </p:txBody>
-      </p:sp>
-      <p:cxnSp>
-        <p:nvCxnSpPr>
-          <p:cNvPr id="31" name="Connector 30"/>
-          <p:cNvCxnSpPr/>
-          <p:nvPr/>
-        </p:nvCxnSpPr>
-        <p:spPr>
-          <a:xfrm>
-            <a:off x="4876800" y="1549400"/>
-            <a:ext cx="0" cy="31750"/>
-          </a:xfrm>
-          <a:prstGeom prst="line">
-            <a:avLst/>
-          </a:prstGeom>
-          <a:ln w="7620">
-            <a:solidFill>
-              <a:srgbClr val="1C1E23"/>
-            </a:solidFill>
-          </a:ln>
-        </p:spPr>
-        <p:style>
-          <a:lnRef idx="2">
-            <a:schemeClr val="accent1"/>
-          </a:lnRef>
-          <a:fillRef idx="0">
-            <a:schemeClr val="accent1"/>
-          </a:fillRef>
-          <a:effectRef idx="1">
-            <a:schemeClr val="accent1"/>
-          </a:effectRef>
-          <a:fontRef idx="minor">
-            <a:schemeClr val="tx1"/>
-          </a:fontRef>
-        </p:style>
-      </p:cxnSp>
-      <p:sp>
-        <p:nvSpPr>
-          <p:cNvPr id="32" name="TextBox 31"/>
-          <p:cNvSpPr txBox="1"/>
-          <p:nvPr/>
-        </p:nvSpPr>
-        <p:spPr>
-          <a:xfrm>
-            <a:off x="3352800" y="1571117"/>
-            <a:ext cx="3048000" cy="164592"/>
-          </a:xfrm>
-          <a:prstGeom prst="rect">
-            <a:avLst/>
-          </a:prstGeom>
-          <a:noFill/>
-        </p:spPr>
-        <p:txBody>
-          <a:bodyPr wrap="none" lIns="0" rIns="0" tIns="0" bIns="0" anchor="ctr">
-            <a:spAutoFit/>
-          </a:bodyPr>
-          <a:lstStyle/>
-          <a:p>
-            <a:pPr algn="ctr"/>
-            <a:r>
-              <a:rPr sz="540" b="0" i="0">
-                <a:solidFill>
-                  <a:srgbClr val="6B727C"/>
-                </a:solidFill>
-                <a:latin typeface="Helvetica"/>
-              </a:rPr>
-              <a:t>pos</a:t>
-            </a:r>
-          </a:p>
-        </p:txBody>
-      </p:sp>
-      <p:cxnSp>
-        <p:nvCxnSpPr>
-          <p:cNvPr id="33" name="Connector 32"/>
-          <p:cNvCxnSpPr/>
-          <p:nvPr/>
-        </p:nvCxnSpPr>
-        <p:spPr>
-          <a:xfrm>
-            <a:off x="3168650" y="1549400"/>
-            <a:ext cx="31750" cy="0"/>
-          </a:xfrm>
-          <a:prstGeom prst="line">
-            <a:avLst/>
-          </a:prstGeom>
-          <a:ln w="7620">
-            <a:solidFill>
-              <a:srgbClr val="1C1E23"/>
-            </a:solidFill>
-          </a:ln>
-        </p:spPr>
-        <p:style>
-          <a:lnRef idx="2">
-            <a:schemeClr val="accent1"/>
-          </a:lnRef>
-          <a:fillRef idx="0">
-            <a:schemeClr val="accent1"/>
-          </a:fillRef>
-          <a:effectRef idx="1">
-            <a:schemeClr val="accent1"/>
-          </a:effectRef>
-          <a:fontRef idx="minor">
-            <a:schemeClr val="tx1"/>
-          </a:fontRef>
-        </p:style>
-      </p:cxnSp>
-      <p:sp>
-        <p:nvSpPr>
-          <p:cNvPr id="34" name="TextBox 33"/>
-          <p:cNvSpPr txBox="1"/>
-          <p:nvPr/>
-        </p:nvSpPr>
-        <p:spPr>
-          <a:xfrm>
-            <a:off x="1630680" y="1480947"/>
-            <a:ext cx="3048000" cy="164592"/>
-          </a:xfrm>
-          <a:prstGeom prst="rect">
-            <a:avLst/>
-          </a:prstGeom>
-          <a:noFill/>
-        </p:spPr>
-        <p:txBody>
-          <a:bodyPr wrap="none" lIns="0" rIns="0" tIns="0" bIns="0" anchor="ctr">
-            <a:spAutoFit/>
-          </a:bodyPr>
-          <a:lstStyle/>
-          <a:p>
-            <a:pPr algn="r"/>
-            <a:r>
-              <a:rPr sz="540" b="0" i="0">
-                <a:solidFill>
-                  <a:srgbClr val="6B727C"/>
-                </a:solidFill>
-                <a:latin typeface="Helvetica"/>
-              </a:rPr>
-              <a:t>neg</a:t>
-            </a:r>
-          </a:p>
-        </p:txBody>
-      </p:sp>
-      <p:cxnSp>
-        <p:nvCxnSpPr>
-          <p:cNvPr id="35" name="Connector 34"/>
-          <p:cNvCxnSpPr/>
-          <p:nvPr/>
-        </p:nvCxnSpPr>
-        <p:spPr>
-          <a:xfrm>
-            <a:off x="3168650" y="965200"/>
-            <a:ext cx="31750" cy="0"/>
-          </a:xfrm>
-          <a:prstGeom prst="line">
-            <a:avLst/>
-          </a:prstGeom>
-          <a:ln w="7620">
-            <a:solidFill>
-              <a:srgbClr val="1C1E23"/>
-            </a:solidFill>
-          </a:ln>
-        </p:spPr>
-        <p:style>
-          <a:lnRef idx="2">
-            <a:schemeClr val="accent1"/>
-          </a:lnRef>
-          <a:fillRef idx="0">
-            <a:schemeClr val="accent1"/>
-          </a:fillRef>
-          <a:effectRef idx="1">
-            <a:schemeClr val="accent1"/>
-          </a:effectRef>
-          <a:fontRef idx="minor">
-            <a:schemeClr val="tx1"/>
-          </a:fontRef>
-        </p:style>
-      </p:cxnSp>
-      <p:sp>
-        <p:nvSpPr>
-          <p:cNvPr id="36" name="TextBox 35"/>
-          <p:cNvSpPr txBox="1"/>
-          <p:nvPr/>
-        </p:nvSpPr>
-        <p:spPr>
-          <a:xfrm>
-            <a:off x="1630680" y="896747"/>
-            <a:ext cx="3048000" cy="164592"/>
-          </a:xfrm>
-          <a:prstGeom prst="rect">
-            <a:avLst/>
-          </a:prstGeom>
-          <a:noFill/>
-        </p:spPr>
-        <p:txBody>
-          <a:bodyPr wrap="none" lIns="0" rIns="0" tIns="0" bIns="0" anchor="ctr">
-            <a:spAutoFit/>
-          </a:bodyPr>
-          <a:lstStyle/>
-          <a:p>
-            <a:pPr algn="r"/>
-            <a:r>
-              <a:rPr sz="540" b="0" i="0">
-                <a:solidFill>
-                  <a:srgbClr val="6B727C"/>
-                </a:solidFill>
-                <a:latin typeface="Helvetica"/>
-              </a:rPr>
-              <a:t>0</a:t>
-            </a:r>
-          </a:p>
-        </p:txBody>
-      </p:sp>
-      <p:cxnSp>
-        <p:nvCxnSpPr>
-          <p:cNvPr id="37" name="Connector 36"/>
-          <p:cNvCxnSpPr/>
-          <p:nvPr/>
-        </p:nvCxnSpPr>
-        <p:spPr>
-          <a:xfrm>
-            <a:off x="3168650" y="381000"/>
-            <a:ext cx="31750" cy="0"/>
-          </a:xfrm>
-          <a:prstGeom prst="line">
-            <a:avLst/>
-          </a:prstGeom>
-          <a:ln w="7620">
-            <a:solidFill>
-              <a:srgbClr val="1C1E23"/>
-            </a:solidFill>
-          </a:ln>
-        </p:spPr>
-        <p:style>
-          <a:lnRef idx="2">
-            <a:schemeClr val="accent1"/>
-          </a:lnRef>
-          <a:fillRef idx="0">
-            <a:schemeClr val="accent1"/>
-          </a:fillRef>
-          <a:effectRef idx="1">
-            <a:schemeClr val="accent1"/>
-          </a:effectRef>
-          <a:fontRef idx="minor">
-            <a:schemeClr val="tx1"/>
-          </a:fontRef>
-        </p:style>
-      </p:cxnSp>
-      <p:sp>
-        <p:nvSpPr>
-          <p:cNvPr id="38" name="TextBox 37"/>
-          <p:cNvSpPr txBox="1"/>
-          <p:nvPr/>
-        </p:nvSpPr>
-        <p:spPr>
-          <a:xfrm>
-            <a:off x="1630680" y="312547"/>
-            <a:ext cx="3048000" cy="164592"/>
-          </a:xfrm>
-          <a:prstGeom prst="rect">
-            <a:avLst/>
-          </a:prstGeom>
-          <a:noFill/>
-        </p:spPr>
-        <p:txBody>
-          <a:bodyPr wrap="none" lIns="0" rIns="0" tIns="0" bIns="0" anchor="ctr">
-            <a:spAutoFit/>
-          </a:bodyPr>
-          <a:lstStyle/>
-          <a:p>
-            <a:pPr algn="r"/>
-            <a:r>
-              <a:rPr sz="540" b="0" i="0">
-                <a:solidFill>
-                  <a:srgbClr val="6B727C"/>
-                </a:solidFill>
-                <a:latin typeface="Helvetica"/>
-              </a:rPr>
-              <a:t>pos</a:t>
-            </a:r>
-          </a:p>
-        </p:txBody>
-      </p:sp>
-      <p:sp>
-        <p:nvSpPr>
-          <p:cNvPr id="39" name="TextBox 38"/>
-          <p:cNvSpPr txBox="1"/>
-          <p:nvPr/>
-        </p:nvSpPr>
-        <p:spPr>
-          <a:xfrm>
-            <a:off x="2514600" y="1668780"/>
-            <a:ext cx="3048000" cy="182879"/>
-          </a:xfrm>
-          <a:prstGeom prst="rect">
-            <a:avLst/>
-          </a:prstGeom>
-          <a:noFill/>
-        </p:spPr>
-        <p:txBody>
-          <a:bodyPr wrap="none" lIns="0" rIns="0" tIns="0" bIns="0" anchor="ctr">
-            <a:spAutoFit/>
-          </a:bodyPr>
-          <a:lstStyle/>
-          <a:p>
-            <a:pPr algn="ctr"/>
-            <a:r>
-              <a:rPr sz="600" b="0" i="0">
-                <a:solidFill>
-                  <a:srgbClr val="1C1E23"/>
-                </a:solidFill>
-                <a:latin typeface="Helvetica"/>
-              </a:rPr>
-              <a:t>Predicted S[a] (binned)</a:t>
-            </a:r>
-          </a:p>
-        </p:txBody>
-      </p:sp>
-      <p:sp>
-        <p:nvSpPr>
-          <p:cNvPr id="40" name="TextBox 39"/>
-          <p:cNvSpPr txBox="1"/>
-          <p:nvPr/>
-        </p:nvSpPr>
-        <p:spPr>
-          <a:xfrm>
-            <a:off x="1638300" y="224917"/>
-            <a:ext cx="3048000" cy="164592"/>
-          </a:xfrm>
-          <a:prstGeom prst="rect">
-            <a:avLst/>
-          </a:prstGeom>
-          <a:noFill/>
-        </p:spPr>
-        <p:txBody>
-          <a:bodyPr wrap="none" lIns="0" rIns="0" tIns="0" bIns="0" anchor="ctr">
-            <a:spAutoFit/>
-          </a:bodyPr>
-          <a:lstStyle/>
-          <a:p>
-            <a:pPr algn="l"/>
-            <a:r>
-              <a:rPr sz="540" b="0" i="0">
-                <a:solidFill>
-                  <a:srgbClr val="1C1E23"/>
-                </a:solidFill>
-                <a:latin typeface="Helvetica"/>
-              </a:rPr>
-              <a:t>Realised utility  g</a:t>
-            </a:r>
-          </a:p>
-        </p:txBody>
-      </p:sp>
-      <p:cxnSp>
-        <p:nvCxnSpPr>
-          <p:cNvPr id="41" name="Connector 40"/>
-          <p:cNvCxnSpPr/>
-          <p:nvPr/>
-        </p:nvCxnSpPr>
-        <p:spPr>
-          <a:xfrm>
-            <a:off x="3200400" y="965200"/>
-            <a:ext cx="1676400" cy="0"/>
-          </a:xfrm>
-          <a:prstGeom prst="line">
-            <a:avLst/>
-          </a:prstGeom>
-          <a:ln w="7620">
-            <a:solidFill>
-              <a:srgbClr val="CCCED3"/>
-            </a:solidFill>
-            <a:prstDash val="dash"/>
-          </a:ln>
-        </p:spPr>
-        <p:style>
-          <a:lnRef idx="2">
-            <a:schemeClr val="accent1"/>
-          </a:lnRef>
-          <a:fillRef idx="0">
-            <a:schemeClr val="accent1"/>
-          </a:fillRef>
-          <a:effectRef idx="1">
-            <a:schemeClr val="accent1"/>
-          </a:effectRef>
-          <a:fontRef idx="minor">
-            <a:schemeClr val="tx1"/>
-          </a:fontRef>
-        </p:style>
-      </p:cxnSp>
-      <p:sp>
-        <p:nvSpPr>
-          <p:cNvPr id="42" name="TextBox 41"/>
-          <p:cNvSpPr txBox="1"/>
-          <p:nvPr/>
-        </p:nvSpPr>
-        <p:spPr>
-          <a:xfrm>
-            <a:off x="2514600" y="789559"/>
-            <a:ext cx="3048000" cy="176784"/>
-          </a:xfrm>
-          <a:prstGeom prst="rect">
-            <a:avLst/>
-          </a:prstGeom>
-          <a:noFill/>
-        </p:spPr>
-        <p:txBody>
-          <a:bodyPr wrap="none" lIns="0" rIns="0" tIns="0" bIns="0" anchor="ctr">
-            <a:spAutoFit/>
-          </a:bodyPr>
-          <a:lstStyle/>
-          <a:p>
-            <a:pPr algn="ctr"/>
-            <a:r>
-              <a:rPr sz="580" b="0" i="0">
-                <a:solidFill>
-                  <a:srgbClr val="AD2B2B"/>
-                </a:solidFill>
-                <a:latin typeface="Helvetica"/>
-              </a:rPr>
-              <a:t>[FIG-UTILITY-CALIBRATION]</a:t>
-            </a:r>
-          </a:p>
-        </p:txBody>
-      </p:sp>
-      <p:sp>
-        <p:nvSpPr>
-          <p:cNvPr id="43" name="TextBox 42"/>
-          <p:cNvSpPr txBox="1"/>
-          <p:nvPr/>
-        </p:nvSpPr>
-        <p:spPr>
-          <a:xfrm>
-            <a:off x="2514600" y="952246"/>
-            <a:ext cx="3048000" cy="158496"/>
-          </a:xfrm>
-          <a:prstGeom prst="rect">
-            <a:avLst/>
-          </a:prstGeom>
-          <a:noFill/>
-        </p:spPr>
-        <p:txBody>
-          <a:bodyPr wrap="none" lIns="0" rIns="0" tIns="0" bIns="0" anchor="ctr">
-            <a:spAutoFit/>
-          </a:bodyPr>
-          <a:lstStyle/>
-          <a:p>
-            <a:pPr algn="ctr"/>
-            <a:r>
-              <a:rPr sz="520" b="0" i="0">
-                <a:solidFill>
-                  <a:srgbClr val="6B727C"/>
-                </a:solidFill>
-                <a:latin typeface="Helvetica"/>
-              </a:rPr>
-              <a:t>bins + 95% CI</a:t>
-            </a:r>
-          </a:p>
-        </p:txBody>
-      </p:sp>
-      <p:sp>
-        <p:nvSpPr>
-          <p:cNvPr id="44" name="TextBox 43"/>
-          <p:cNvSpPr txBox="1"/>
-          <p:nvPr/>
-        </p:nvSpPr>
-        <p:spPr>
-          <a:xfrm>
-            <a:off x="990600" y="1765045"/>
-            <a:ext cx="3048000" cy="158496"/>
-          </a:xfrm>
-          <a:prstGeom prst="rect">
-            <a:avLst/>
-          </a:prstGeom>
-          <a:noFill/>
-        </p:spPr>
-        <p:txBody>
-          <a:bodyPr wrap="none" lIns="0" rIns="0" tIns="0" bIns="0" anchor="ctr">
-            <a:spAutoFit/>
-          </a:bodyPr>
-          <a:lstStyle/>
-          <a:p>
-            <a:pPr algn="ctr"/>
-            <a:r>
-              <a:rPr sz="520" b="0" i="0">
-                <a:solidFill>
-                  <a:srgbClr val="6B727C"/>
-                </a:solidFill>
-                <a:latin typeface="Helvetica"/>
-              </a:rPr>
-              <a:t>Sign agreement only; no calibration guarantee is claimed.</a:t>
+              <a:t>The score orders actions and the order agrees in sign with what the actions did. No claim is made that the score is on the scale of the utility.</a:t>
             </a:r>
           </a:p>
         </p:txBody>
